--- a/output_pptx/Jesus_Is_Alive.pptx
+++ b/output_pptx/Jesus_Is_Alive.pptx
@@ -3126,23 +3126,23 @@
         </p:nvSpPr>
         <p:spPr>
           <a:xfrm>
-            <a:off x="594360" y="1837944"/>
-            <a:ext cx="11002975" cy="685800"/>
-          </a:xfrm>
-          <a:prstGeom prst="rect">
-            <a:avLst/>
-          </a:prstGeom>
-          <a:noFill/>
-        </p:spPr>
-        <p:txBody>
-          <a:bodyPr wrap="square">
-            <a:spAutoFit/>
-          </a:bodyPr>
-          <a:lstStyle/>
-          <a:p>
-            <a:pPr algn="ctr"/>
-            <a:r>
-              <a:rPr sz="4400" b="1" i="0">
+            <a:off x="640080" y="1650492"/>
+            <a:ext cx="10911535" cy="731520"/>
+          </a:xfrm>
+          <a:prstGeom prst="rect">
+            <a:avLst/>
+          </a:prstGeom>
+          <a:noFill/>
+        </p:spPr>
+        <p:txBody>
+          <a:bodyPr wrap="square">
+            <a:spAutoFit/>
+          </a:bodyPr>
+          <a:lstStyle/>
+          <a:p>
+            <a:pPr algn="ctr"/>
+            <a:r>
+              <a:rPr sz="4800" b="1" i="0">
                 <a:solidFill>
                   <a:srgbClr val="FFFFFF"/>
                 </a:solidFill>
@@ -3161,8 +3161,8 @@
         </p:nvSpPr>
         <p:spPr>
           <a:xfrm>
-            <a:off x="594360" y="2560320"/>
-            <a:ext cx="11002975" cy="384048"/>
+            <a:off x="640080" y="2418588"/>
+            <a:ext cx="10911535" cy="365760"/>
           </a:xfrm>
           <a:prstGeom prst="rect">
             <a:avLst/>
@@ -3179,7 +3179,7 @@
             <a:r>
               <a:rPr sz="2400" b="0" i="1">
                 <a:solidFill>
-                  <a:srgbClr val="B4B4B4"/>
+                  <a:srgbClr val="AAAAAA"/>
                 </a:solidFill>
                 <a:latin typeface="Arial"/>
               </a:rPr>
@@ -3196,8 +3196,78 @@
         </p:nvSpPr>
         <p:spPr>
           <a:xfrm>
-            <a:off x="594360" y="2980944"/>
-            <a:ext cx="11002975" cy="347472"/>
+            <a:off x="640080" y="2985516"/>
+            <a:ext cx="10911535" cy="731520"/>
+          </a:xfrm>
+          <a:prstGeom prst="rect">
+            <a:avLst/>
+          </a:prstGeom>
+          <a:noFill/>
+        </p:spPr>
+        <p:txBody>
+          <a:bodyPr wrap="square">
+            <a:spAutoFit/>
+          </a:bodyPr>
+          <a:lstStyle/>
+          <a:p>
+            <a:pPr algn="ctr"/>
+            <a:r>
+              <a:rPr sz="4800" b="1" i="0">
+                <a:solidFill>
+                  <a:srgbClr val="FFFFFF"/>
+                </a:solidFill>
+                <a:latin typeface="Arial"/>
+              </a:rPr>
+              <a:t>つづく 希望が いまここに</a:t>
+            </a:r>
+          </a:p>
+        </p:txBody>
+      </p:sp>
+      <p:sp>
+        <p:nvSpPr>
+          <p:cNvPr id="5" name="TextBox 4"/>
+          <p:cNvSpPr txBox="1"/>
+          <p:nvPr/>
+        </p:nvSpPr>
+        <p:spPr>
+          <a:xfrm>
+            <a:off x="640080" y="3753612"/>
+            <a:ext cx="10911535" cy="365760"/>
+          </a:xfrm>
+          <a:prstGeom prst="rect">
+            <a:avLst/>
+          </a:prstGeom>
+          <a:noFill/>
+        </p:spPr>
+        <p:txBody>
+          <a:bodyPr wrap="square">
+            <a:spAutoFit/>
+          </a:bodyPr>
+          <a:lstStyle/>
+          <a:p>
+            <a:pPr algn="ctr"/>
+            <a:r>
+              <a:rPr sz="2400" b="0" i="1">
+                <a:solidFill>
+                  <a:srgbClr val="AAAAAA"/>
+                </a:solidFill>
+                <a:latin typeface="Arial"/>
+              </a:rPr>
+              <a:t>tsuzuku kibo-ga i-makokoni</a:t>
+            </a:r>
+          </a:p>
+        </p:txBody>
+      </p:sp>
+      <p:sp>
+        <p:nvSpPr>
+          <p:cNvPr id="6" name="TextBox 5"/>
+          <p:cNvSpPr txBox="1"/>
+          <p:nvPr/>
+        </p:nvSpPr>
+        <p:spPr>
+          <a:xfrm>
+            <a:off x="640080" y="4530852"/>
+            <a:ext cx="10911535" cy="310896"/>
           </a:xfrm>
           <a:prstGeom prst="rect">
             <a:avLst/>
@@ -3214,7 +3284,7 @@
             <a:r>
               <a:rPr sz="2000" b="0" i="1">
                 <a:solidFill>
-                  <a:srgbClr val="8C8C8C"/>
+                  <a:srgbClr val="828282"/>
                 </a:solidFill>
                 <a:latin typeface="Arial"/>
               </a:rPr>
@@ -3225,84 +3295,14 @@
       </p:sp>
       <p:sp>
         <p:nvSpPr>
-          <p:cNvPr id="5" name="TextBox 4"/>
-          <p:cNvSpPr txBox="1"/>
-          <p:nvPr/>
-        </p:nvSpPr>
-        <p:spPr>
-          <a:xfrm>
-            <a:off x="594360" y="3529584"/>
-            <a:ext cx="11002975" cy="685800"/>
-          </a:xfrm>
-          <a:prstGeom prst="rect">
-            <a:avLst/>
-          </a:prstGeom>
-          <a:noFill/>
-        </p:spPr>
-        <p:txBody>
-          <a:bodyPr wrap="square">
-            <a:spAutoFit/>
-          </a:bodyPr>
-          <a:lstStyle/>
-          <a:p>
-            <a:pPr algn="ctr"/>
-            <a:r>
-              <a:rPr sz="4400" b="1" i="0">
-                <a:solidFill>
-                  <a:srgbClr val="FFFFFF"/>
-                </a:solidFill>
-                <a:latin typeface="Arial"/>
-              </a:rPr>
-              <a:t>つづく 希望が いまここに</a:t>
-            </a:r>
-          </a:p>
-        </p:txBody>
-      </p:sp>
-      <p:sp>
-        <p:nvSpPr>
-          <p:cNvPr id="6" name="TextBox 5"/>
-          <p:cNvSpPr txBox="1"/>
-          <p:nvPr/>
-        </p:nvSpPr>
-        <p:spPr>
-          <a:xfrm>
-            <a:off x="594360" y="4251960"/>
-            <a:ext cx="11002975" cy="384048"/>
-          </a:xfrm>
-          <a:prstGeom prst="rect">
-            <a:avLst/>
-          </a:prstGeom>
-          <a:noFill/>
-        </p:spPr>
-        <p:txBody>
-          <a:bodyPr wrap="square">
-            <a:spAutoFit/>
-          </a:bodyPr>
-          <a:lstStyle/>
-          <a:p>
-            <a:pPr algn="ctr"/>
-            <a:r>
-              <a:rPr sz="2400" b="0" i="1">
-                <a:solidFill>
-                  <a:srgbClr val="B4B4B4"/>
-                </a:solidFill>
-                <a:latin typeface="Arial"/>
-              </a:rPr>
-              <a:t>tsuzuku kibo-ga i-makokoni</a:t>
-            </a:r>
-          </a:p>
-        </p:txBody>
-      </p:sp>
-      <p:sp>
-        <p:nvSpPr>
           <p:cNvPr id="7" name="TextBox 6"/>
           <p:cNvSpPr txBox="1"/>
           <p:nvPr/>
         </p:nvSpPr>
         <p:spPr>
           <a:xfrm>
-            <a:off x="594360" y="4672584"/>
-            <a:ext cx="11002975" cy="347472"/>
+            <a:off x="640080" y="4896612"/>
+            <a:ext cx="10911535" cy="310896"/>
           </a:xfrm>
           <a:prstGeom prst="rect">
             <a:avLst/>
@@ -3319,7 +3319,7 @@
             <a:r>
               <a:rPr sz="2000" b="0" i="1">
                 <a:solidFill>
-                  <a:srgbClr val="8C8C8C"/>
+                  <a:srgbClr val="828282"/>
                 </a:solidFill>
                 <a:latin typeface="Arial"/>
               </a:rPr>
@@ -3362,23 +3362,23 @@
         </p:nvSpPr>
         <p:spPr>
           <a:xfrm>
-            <a:off x="594360" y="2258568"/>
-            <a:ext cx="11002975" cy="685800"/>
-          </a:xfrm>
-          <a:prstGeom prst="rect">
-            <a:avLst/>
-          </a:prstGeom>
-          <a:noFill/>
-        </p:spPr>
-        <p:txBody>
-          <a:bodyPr wrap="square">
-            <a:spAutoFit/>
-          </a:bodyPr>
-          <a:lstStyle/>
-          <a:p>
-            <a:pPr algn="ctr"/>
-            <a:r>
-              <a:rPr sz="4400" b="1" i="0">
+            <a:off x="640080" y="2052828"/>
+            <a:ext cx="10911535" cy="731520"/>
+          </a:xfrm>
+          <a:prstGeom prst="rect">
+            <a:avLst/>
+          </a:prstGeom>
+          <a:noFill/>
+        </p:spPr>
+        <p:txBody>
+          <a:bodyPr wrap="square">
+            <a:spAutoFit/>
+          </a:bodyPr>
+          <a:lstStyle/>
+          <a:p>
+            <a:pPr algn="ctr"/>
+            <a:r>
+              <a:rPr sz="4800" b="1" i="0">
                 <a:solidFill>
                   <a:srgbClr val="FFFFFF"/>
                 </a:solidFill>
@@ -3397,99 +3397,29 @@
         </p:nvSpPr>
         <p:spPr>
           <a:xfrm>
-            <a:off x="594360" y="2980944"/>
-            <a:ext cx="11002975" cy="347472"/>
-          </a:xfrm>
-          <a:prstGeom prst="rect">
-            <a:avLst/>
-          </a:prstGeom>
-          <a:noFill/>
-        </p:spPr>
-        <p:txBody>
-          <a:bodyPr wrap="square">
-            <a:spAutoFit/>
-          </a:bodyPr>
-          <a:lstStyle/>
-          <a:p>
-            <a:pPr algn="ctr"/>
-            <a:r>
-              <a:rPr sz="2200" b="0" i="1">
-                <a:solidFill>
-                  <a:srgbClr val="8C8C8C"/>
-                </a:solidFill>
-                <a:latin typeface="Arial"/>
-              </a:rPr>
-              <a:t/>
-            </a:r>
-          </a:p>
-        </p:txBody>
-      </p:sp>
-      <p:sp>
-        <p:nvSpPr>
-          <p:cNvPr id="4" name="TextBox 3"/>
-          <p:cNvSpPr txBox="1"/>
-          <p:nvPr/>
-        </p:nvSpPr>
-        <p:spPr>
-          <a:xfrm>
-            <a:off x="594360" y="3529584"/>
-            <a:ext cx="11002975" cy="685800"/>
-          </a:xfrm>
-          <a:prstGeom prst="rect">
-            <a:avLst/>
-          </a:prstGeom>
-          <a:noFill/>
-        </p:spPr>
-        <p:txBody>
-          <a:bodyPr wrap="square">
-            <a:spAutoFit/>
-          </a:bodyPr>
-          <a:lstStyle/>
-          <a:p>
-            <a:pPr algn="ctr"/>
-            <a:r>
-              <a:rPr sz="4400" b="1" i="0">
+            <a:off x="640080" y="2985516"/>
+            <a:ext cx="10911535" cy="731520"/>
+          </a:xfrm>
+          <a:prstGeom prst="rect">
+            <a:avLst/>
+          </a:prstGeom>
+          <a:noFill/>
+        </p:spPr>
+        <p:txBody>
+          <a:bodyPr wrap="square">
+            <a:spAutoFit/>
+          </a:bodyPr>
+          <a:lstStyle/>
+          <a:p>
+            <a:pPr algn="ctr"/>
+            <a:r>
+              <a:rPr sz="4800" b="1" i="0">
                 <a:solidFill>
                   <a:srgbClr val="FFFFFF"/>
                 </a:solidFill>
                 <a:latin typeface="Arial"/>
               </a:rPr>
               <a:t>Ele está vivo</a:t>
-            </a:r>
-          </a:p>
-        </p:txBody>
-      </p:sp>
-      <p:sp>
-        <p:nvSpPr>
-          <p:cNvPr id="5" name="TextBox 4"/>
-          <p:cNvSpPr txBox="1"/>
-          <p:nvPr/>
-        </p:nvSpPr>
-        <p:spPr>
-          <a:xfrm>
-            <a:off x="594360" y="4251960"/>
-            <a:ext cx="11002975" cy="347472"/>
-          </a:xfrm>
-          <a:prstGeom prst="rect">
-            <a:avLst/>
-          </a:prstGeom>
-          <a:noFill/>
-        </p:spPr>
-        <p:txBody>
-          <a:bodyPr wrap="square">
-            <a:spAutoFit/>
-          </a:bodyPr>
-          <a:lstStyle/>
-          <a:p>
-            <a:pPr algn="ctr"/>
-            <a:r>
-              <a:rPr sz="2200" b="0" i="1">
-                <a:solidFill>
-                  <a:srgbClr val="8C8C8C"/>
-                </a:solidFill>
-                <a:latin typeface="Arial"/>
-              </a:rPr>
-              <a:t/>
             </a:r>
           </a:p>
         </p:txBody>
@@ -3528,64 +3458,29 @@
         </p:nvSpPr>
         <p:spPr>
           <a:xfrm>
-            <a:off x="594360" y="2894076"/>
-            <a:ext cx="11002975" cy="685800"/>
-          </a:xfrm>
-          <a:prstGeom prst="rect">
-            <a:avLst/>
-          </a:prstGeom>
-          <a:noFill/>
-        </p:spPr>
-        <p:txBody>
-          <a:bodyPr wrap="square">
-            <a:spAutoFit/>
-          </a:bodyPr>
-          <a:lstStyle/>
-          <a:p>
-            <a:pPr algn="ctr"/>
-            <a:r>
-              <a:rPr sz="4400" b="1" i="0">
+            <a:off x="640080" y="2702052"/>
+            <a:ext cx="10911535" cy="731520"/>
+          </a:xfrm>
+          <a:prstGeom prst="rect">
+            <a:avLst/>
+          </a:prstGeom>
+          <a:noFill/>
+        </p:spPr>
+        <p:txBody>
+          <a:bodyPr wrap="square">
+            <a:spAutoFit/>
+          </a:bodyPr>
+          <a:lstStyle/>
+          <a:p>
+            <a:pPr algn="ctr"/>
+            <a:r>
+              <a:rPr sz="4800" b="1" i="0">
                 <a:solidFill>
                   <a:srgbClr val="FFFFFF"/>
                 </a:solidFill>
                 <a:latin typeface="Arial"/>
               </a:rPr>
               <a:t>Ele é o alfa e o ômega</a:t>
-            </a:r>
-          </a:p>
-        </p:txBody>
-      </p:sp>
-      <p:sp>
-        <p:nvSpPr>
-          <p:cNvPr id="3" name="TextBox 2"/>
-          <p:cNvSpPr txBox="1"/>
-          <p:nvPr/>
-        </p:nvSpPr>
-        <p:spPr>
-          <a:xfrm>
-            <a:off x="594360" y="3616452"/>
-            <a:ext cx="11002975" cy="347472"/>
-          </a:xfrm>
-          <a:prstGeom prst="rect">
-            <a:avLst/>
-          </a:prstGeom>
-          <a:noFill/>
-        </p:spPr>
-        <p:txBody>
-          <a:bodyPr wrap="square">
-            <a:spAutoFit/>
-          </a:bodyPr>
-          <a:lstStyle/>
-          <a:p>
-            <a:pPr algn="ctr"/>
-            <a:r>
-              <a:rPr sz="2200" b="0" i="1">
-                <a:solidFill>
-                  <a:srgbClr val="8C8C8C"/>
-                </a:solidFill>
-                <a:latin typeface="Arial"/>
-              </a:rPr>
-              <a:t/>
             </a:r>
           </a:p>
         </p:txBody>
@@ -3624,23 +3519,23 @@
         </p:nvSpPr>
         <p:spPr>
           <a:xfrm>
-            <a:off x="594360" y="2258568"/>
-            <a:ext cx="11002975" cy="685800"/>
-          </a:xfrm>
-          <a:prstGeom prst="rect">
-            <a:avLst/>
-          </a:prstGeom>
-          <a:noFill/>
-        </p:spPr>
-        <p:txBody>
-          <a:bodyPr wrap="square">
-            <a:spAutoFit/>
-          </a:bodyPr>
-          <a:lstStyle/>
-          <a:p>
-            <a:pPr algn="ctr"/>
-            <a:r>
-              <a:rPr sz="4400" b="1" i="0">
+            <a:off x="640080" y="2052828"/>
+            <a:ext cx="10911535" cy="731520"/>
+          </a:xfrm>
+          <a:prstGeom prst="rect">
+            <a:avLst/>
+          </a:prstGeom>
+          <a:noFill/>
+        </p:spPr>
+        <p:txBody>
+          <a:bodyPr wrap="square">
+            <a:spAutoFit/>
+          </a:bodyPr>
+          <a:lstStyle/>
+          <a:p>
+            <a:pPr algn="ctr"/>
+            <a:r>
+              <a:rPr sz="4800" b="1" i="0">
                 <a:solidFill>
                   <a:srgbClr val="FFFFFF"/>
                 </a:solidFill>
@@ -3659,25 +3554,60 @@
         </p:nvSpPr>
         <p:spPr>
           <a:xfrm>
-            <a:off x="594360" y="2980944"/>
-            <a:ext cx="11002975" cy="347472"/>
-          </a:xfrm>
-          <a:prstGeom prst="rect">
-            <a:avLst/>
-          </a:prstGeom>
-          <a:noFill/>
-        </p:spPr>
-        <p:txBody>
-          <a:bodyPr wrap="square">
-            <a:spAutoFit/>
-          </a:bodyPr>
-          <a:lstStyle/>
-          <a:p>
-            <a:pPr algn="ctr"/>
-            <a:r>
-              <a:rPr sz="2200" b="0" i="1">
-                <a:solidFill>
-                  <a:srgbClr val="8C8C8C"/>
+            <a:off x="640080" y="2985516"/>
+            <a:ext cx="10911535" cy="731520"/>
+          </a:xfrm>
+          <a:prstGeom prst="rect">
+            <a:avLst/>
+          </a:prstGeom>
+          <a:noFill/>
+        </p:spPr>
+        <p:txBody>
+          <a:bodyPr wrap="square">
+            <a:spAutoFit/>
+          </a:bodyPr>
+          <a:lstStyle/>
+          <a:p>
+            <a:pPr algn="ctr"/>
+            <a:r>
+              <a:rPr sz="4600" b="1" i="0">
+                <a:solidFill>
+                  <a:srgbClr val="FFFFFF"/>
+                </a:solidFill>
+                <a:latin typeface="Arial"/>
+              </a:rPr>
+              <a:t>A maldição do pecado foi quebrada</a:t>
+            </a:r>
+          </a:p>
+        </p:txBody>
+      </p:sp>
+      <p:sp>
+        <p:nvSpPr>
+          <p:cNvPr id="4" name="TextBox 3"/>
+          <p:cNvSpPr txBox="1"/>
+          <p:nvPr/>
+        </p:nvSpPr>
+        <p:spPr>
+          <a:xfrm>
+            <a:off x="640080" y="4128516"/>
+            <a:ext cx="10911535" cy="310896"/>
+          </a:xfrm>
+          <a:prstGeom prst="rect">
+            <a:avLst/>
+          </a:prstGeom>
+          <a:noFill/>
+        </p:spPr>
+        <p:txBody>
+          <a:bodyPr wrap="square">
+            <a:spAutoFit/>
+          </a:bodyPr>
+          <a:lstStyle/>
+          <a:p>
+            <a:pPr algn="ctr"/>
+            <a:r>
+              <a:rPr sz="2000" b="0" i="0">
+                <a:solidFill>
+                  <a:srgbClr val="828282"/>
                 </a:solidFill>
                 <a:latin typeface="Arial"/>
               </a:rPr>
@@ -3688,66 +3618,31 @@
       </p:sp>
       <p:sp>
         <p:nvSpPr>
-          <p:cNvPr id="4" name="TextBox 3"/>
-          <p:cNvSpPr txBox="1"/>
-          <p:nvPr/>
-        </p:nvSpPr>
-        <p:spPr>
-          <a:xfrm>
-            <a:off x="594360" y="3529584"/>
-            <a:ext cx="11002975" cy="685800"/>
-          </a:xfrm>
-          <a:prstGeom prst="rect">
-            <a:avLst/>
-          </a:prstGeom>
-          <a:noFill/>
-        </p:spPr>
-        <p:txBody>
-          <a:bodyPr wrap="square">
-            <a:spAutoFit/>
-          </a:bodyPr>
-          <a:lstStyle/>
-          <a:p>
-            <a:pPr algn="ctr"/>
-            <a:r>
-              <a:rPr sz="4266" b="1" i="0">
-                <a:solidFill>
-                  <a:srgbClr val="FFFFFF"/>
-                </a:solidFill>
-                <a:latin typeface="Arial"/>
-              </a:rPr>
-              <a:t>A maldição do pecado foi quebrada</a:t>
-            </a:r>
-          </a:p>
-        </p:txBody>
-      </p:sp>
-      <p:sp>
-        <p:nvSpPr>
           <p:cNvPr id="5" name="TextBox 4"/>
           <p:cNvSpPr txBox="1"/>
           <p:nvPr/>
         </p:nvSpPr>
         <p:spPr>
           <a:xfrm>
-            <a:off x="594360" y="4251960"/>
-            <a:ext cx="11002975" cy="347472"/>
-          </a:xfrm>
-          <a:prstGeom prst="rect">
-            <a:avLst/>
-          </a:prstGeom>
-          <a:noFill/>
-        </p:spPr>
-        <p:txBody>
-          <a:bodyPr wrap="square">
-            <a:spAutoFit/>
-          </a:bodyPr>
-          <a:lstStyle/>
-          <a:p>
-            <a:pPr algn="ctr"/>
-            <a:r>
-              <a:rPr sz="2200" b="0" i="1">
-                <a:solidFill>
-                  <a:srgbClr val="8C8C8C"/>
+            <a:off x="640080" y="4494276"/>
+            <a:ext cx="10911535" cy="310896"/>
+          </a:xfrm>
+          <a:prstGeom prst="rect">
+            <a:avLst/>
+          </a:prstGeom>
+          <a:noFill/>
+        </p:spPr>
+        <p:txBody>
+          <a:bodyPr wrap="square">
+            <a:spAutoFit/>
+          </a:bodyPr>
+          <a:lstStyle/>
+          <a:p>
+            <a:pPr algn="ctr"/>
+            <a:r>
+              <a:rPr sz="2000" b="0" i="0">
+                <a:solidFill>
+                  <a:srgbClr val="828282"/>
                 </a:solidFill>
                 <a:latin typeface="Arial"/>
               </a:rPr>
@@ -3790,23 +3685,23 @@
         </p:nvSpPr>
         <p:spPr>
           <a:xfrm>
-            <a:off x="594360" y="2258568"/>
-            <a:ext cx="11002975" cy="685800"/>
-          </a:xfrm>
-          <a:prstGeom prst="rect">
-            <a:avLst/>
-          </a:prstGeom>
-          <a:noFill/>
-        </p:spPr>
-        <p:txBody>
-          <a:bodyPr wrap="square">
-            <a:spAutoFit/>
-          </a:bodyPr>
-          <a:lstStyle/>
-          <a:p>
-            <a:pPr algn="ctr"/>
-            <a:r>
-              <a:rPr sz="4400" b="1" i="0">
+            <a:off x="640080" y="2052828"/>
+            <a:ext cx="10911535" cy="731520"/>
+          </a:xfrm>
+          <a:prstGeom prst="rect">
+            <a:avLst/>
+          </a:prstGeom>
+          <a:noFill/>
+        </p:spPr>
+        <p:txBody>
+          <a:bodyPr wrap="square">
+            <a:spAutoFit/>
+          </a:bodyPr>
+          <a:lstStyle/>
+          <a:p>
+            <a:pPr algn="ctr"/>
+            <a:r>
+              <a:rPr sz="4800" b="1" i="0">
                 <a:solidFill>
                   <a:srgbClr val="FFFFFF"/>
                 </a:solidFill>
@@ -3825,25 +3720,60 @@
         </p:nvSpPr>
         <p:spPr>
           <a:xfrm>
-            <a:off x="594360" y="2980944"/>
-            <a:ext cx="11002975" cy="347472"/>
-          </a:xfrm>
-          <a:prstGeom prst="rect">
-            <a:avLst/>
-          </a:prstGeom>
-          <a:noFill/>
-        </p:spPr>
-        <p:txBody>
-          <a:bodyPr wrap="square">
-            <a:spAutoFit/>
-          </a:bodyPr>
-          <a:lstStyle/>
-          <a:p>
-            <a:pPr algn="ctr"/>
-            <a:r>
-              <a:rPr sz="2200" b="0" i="1">
-                <a:solidFill>
-                  <a:srgbClr val="8C8C8C"/>
+            <a:off x="640080" y="2985516"/>
+            <a:ext cx="10911535" cy="731520"/>
+          </a:xfrm>
+          <a:prstGeom prst="rect">
+            <a:avLst/>
+          </a:prstGeom>
+          <a:noFill/>
+        </p:spPr>
+        <p:txBody>
+          <a:bodyPr wrap="square">
+            <a:spAutoFit/>
+          </a:bodyPr>
+          <a:lstStyle/>
+          <a:p>
+            <a:pPr algn="ctr"/>
+            <a:r>
+              <a:rPr sz="4800" b="1" i="0">
+                <a:solidFill>
+                  <a:srgbClr val="FFFFFF"/>
+                </a:solidFill>
+                <a:latin typeface="Arial"/>
+              </a:rPr>
+              <a:t>O Cordeiro de Deus ressuscitou</a:t>
+            </a:r>
+          </a:p>
+        </p:txBody>
+      </p:sp>
+      <p:sp>
+        <p:nvSpPr>
+          <p:cNvPr id="4" name="TextBox 3"/>
+          <p:cNvSpPr txBox="1"/>
+          <p:nvPr/>
+        </p:nvSpPr>
+        <p:spPr>
+          <a:xfrm>
+            <a:off x="640080" y="4128516"/>
+            <a:ext cx="10911535" cy="310896"/>
+          </a:xfrm>
+          <a:prstGeom prst="rect">
+            <a:avLst/>
+          </a:prstGeom>
+          <a:noFill/>
+        </p:spPr>
+        <p:txBody>
+          <a:bodyPr wrap="square">
+            <a:spAutoFit/>
+          </a:bodyPr>
+          <a:lstStyle/>
+          <a:p>
+            <a:pPr algn="ctr"/>
+            <a:r>
+              <a:rPr sz="2000" b="0" i="0">
+                <a:solidFill>
+                  <a:srgbClr val="828282"/>
                 </a:solidFill>
                 <a:latin typeface="Arial"/>
               </a:rPr>
@@ -3854,66 +3784,31 @@
       </p:sp>
       <p:sp>
         <p:nvSpPr>
-          <p:cNvPr id="4" name="TextBox 3"/>
-          <p:cNvSpPr txBox="1"/>
-          <p:nvPr/>
-        </p:nvSpPr>
-        <p:spPr>
-          <a:xfrm>
-            <a:off x="594360" y="3529584"/>
-            <a:ext cx="11002975" cy="685800"/>
-          </a:xfrm>
-          <a:prstGeom prst="rect">
-            <a:avLst/>
-          </a:prstGeom>
-          <a:noFill/>
-        </p:spPr>
-        <p:txBody>
-          <a:bodyPr wrap="square">
-            <a:spAutoFit/>
-          </a:bodyPr>
-          <a:lstStyle/>
-          <a:p>
-            <a:pPr algn="ctr"/>
-            <a:r>
-              <a:rPr sz="4400" b="1" i="0">
-                <a:solidFill>
-                  <a:srgbClr val="FFFFFF"/>
-                </a:solidFill>
-                <a:latin typeface="Arial"/>
-              </a:rPr>
-              <a:t>O Cordeiro de Deus ressuscitou</a:t>
-            </a:r>
-          </a:p>
-        </p:txBody>
-      </p:sp>
-      <p:sp>
-        <p:nvSpPr>
           <p:cNvPr id="5" name="TextBox 4"/>
           <p:cNvSpPr txBox="1"/>
           <p:nvPr/>
         </p:nvSpPr>
         <p:spPr>
           <a:xfrm>
-            <a:off x="594360" y="4251960"/>
-            <a:ext cx="11002975" cy="347472"/>
-          </a:xfrm>
-          <a:prstGeom prst="rect">
-            <a:avLst/>
-          </a:prstGeom>
-          <a:noFill/>
-        </p:spPr>
-        <p:txBody>
-          <a:bodyPr wrap="square">
-            <a:spAutoFit/>
-          </a:bodyPr>
-          <a:lstStyle/>
-          <a:p>
-            <a:pPr algn="ctr"/>
-            <a:r>
-              <a:rPr sz="2200" b="0" i="1">
-                <a:solidFill>
-                  <a:srgbClr val="8C8C8C"/>
+            <a:off x="640080" y="4494276"/>
+            <a:ext cx="10911535" cy="310896"/>
+          </a:xfrm>
+          <a:prstGeom prst="rect">
+            <a:avLst/>
+          </a:prstGeom>
+          <a:noFill/>
+        </p:spPr>
+        <p:txBody>
+          <a:bodyPr wrap="square">
+            <a:spAutoFit/>
+          </a:bodyPr>
+          <a:lstStyle/>
+          <a:p>
+            <a:pPr algn="ctr"/>
+            <a:r>
+              <a:rPr sz="2000" b="0" i="0">
+                <a:solidFill>
+                  <a:srgbClr val="828282"/>
                 </a:solidFill>
                 <a:latin typeface="Arial"/>
               </a:rPr>
@@ -3956,23 +3851,23 @@
         </p:nvSpPr>
         <p:spPr>
           <a:xfrm>
-            <a:off x="594360" y="2258568"/>
-            <a:ext cx="11002975" cy="685800"/>
-          </a:xfrm>
-          <a:prstGeom prst="rect">
-            <a:avLst/>
-          </a:prstGeom>
-          <a:noFill/>
-        </p:spPr>
-        <p:txBody>
-          <a:bodyPr wrap="square">
-            <a:spAutoFit/>
-          </a:bodyPr>
-          <a:lstStyle/>
-          <a:p>
-            <a:pPr algn="ctr"/>
-            <a:r>
-              <a:rPr sz="4400" b="1" i="0">
+            <a:off x="640080" y="2052828"/>
+            <a:ext cx="10911535" cy="731520"/>
+          </a:xfrm>
+          <a:prstGeom prst="rect">
+            <a:avLst/>
+          </a:prstGeom>
+          <a:noFill/>
+        </p:spPr>
+        <p:txBody>
+          <a:bodyPr wrap="square">
+            <a:spAutoFit/>
+          </a:bodyPr>
+          <a:lstStyle/>
+          <a:p>
+            <a:pPr algn="ctr"/>
+            <a:r>
+              <a:rPr sz="4800" b="1" i="0">
                 <a:solidFill>
                   <a:srgbClr val="FFFFFF"/>
                 </a:solidFill>
@@ -3991,99 +3886,29 @@
         </p:nvSpPr>
         <p:spPr>
           <a:xfrm>
-            <a:off x="594360" y="2980944"/>
-            <a:ext cx="11002975" cy="347472"/>
-          </a:xfrm>
-          <a:prstGeom prst="rect">
-            <a:avLst/>
-          </a:prstGeom>
-          <a:noFill/>
-        </p:spPr>
-        <p:txBody>
-          <a:bodyPr wrap="square">
-            <a:spAutoFit/>
-          </a:bodyPr>
-          <a:lstStyle/>
-          <a:p>
-            <a:pPr algn="ctr"/>
-            <a:r>
-              <a:rPr sz="2200" b="0" i="1">
-                <a:solidFill>
-                  <a:srgbClr val="8C8C8C"/>
-                </a:solidFill>
-                <a:latin typeface="Arial"/>
-              </a:rPr>
-              <a:t/>
-            </a:r>
-          </a:p>
-        </p:txBody>
-      </p:sp>
-      <p:sp>
-        <p:nvSpPr>
-          <p:cNvPr id="4" name="TextBox 3"/>
-          <p:cNvSpPr txBox="1"/>
-          <p:nvPr/>
-        </p:nvSpPr>
-        <p:spPr>
-          <a:xfrm>
-            <a:off x="594360" y="3529584"/>
-            <a:ext cx="11002975" cy="685800"/>
-          </a:xfrm>
-          <a:prstGeom prst="rect">
-            <a:avLst/>
-          </a:prstGeom>
-          <a:noFill/>
-        </p:spPr>
-        <p:txBody>
-          <a:bodyPr wrap="square">
-            <a:spAutoFit/>
-          </a:bodyPr>
-          <a:lstStyle/>
-          <a:p>
-            <a:pPr algn="ctr"/>
-            <a:r>
-              <a:rPr sz="4400" b="1" i="0">
+            <a:off x="640080" y="2985516"/>
+            <a:ext cx="10911535" cy="731520"/>
+          </a:xfrm>
+          <a:prstGeom prst="rect">
+            <a:avLst/>
+          </a:prstGeom>
+          <a:noFill/>
+        </p:spPr>
+        <p:txBody>
+          <a:bodyPr wrap="square">
+            <a:spAutoFit/>
+          </a:bodyPr>
+          <a:lstStyle/>
+          <a:p>
+            <a:pPr algn="ctr"/>
+            <a:r>
+              <a:rPr sz="4800" b="1" i="0">
                 <a:solidFill>
                   <a:srgbClr val="FFFFFF"/>
                 </a:solidFill>
                 <a:latin typeface="Arial"/>
               </a:rPr>
               <a:t>Ele está vivo</a:t>
-            </a:r>
-          </a:p>
-        </p:txBody>
-      </p:sp>
-      <p:sp>
-        <p:nvSpPr>
-          <p:cNvPr id="5" name="TextBox 4"/>
-          <p:cNvSpPr txBox="1"/>
-          <p:nvPr/>
-        </p:nvSpPr>
-        <p:spPr>
-          <a:xfrm>
-            <a:off x="594360" y="4251960"/>
-            <a:ext cx="11002975" cy="347472"/>
-          </a:xfrm>
-          <a:prstGeom prst="rect">
-            <a:avLst/>
-          </a:prstGeom>
-          <a:noFill/>
-        </p:spPr>
-        <p:txBody>
-          <a:bodyPr wrap="square">
-            <a:spAutoFit/>
-          </a:bodyPr>
-          <a:lstStyle/>
-          <a:p>
-            <a:pPr algn="ctr"/>
-            <a:r>
-              <a:rPr sz="2200" b="0" i="1">
-                <a:solidFill>
-                  <a:srgbClr val="8C8C8C"/>
-                </a:solidFill>
-                <a:latin typeface="Arial"/>
-              </a:rPr>
-              <a:t/>
             </a:r>
           </a:p>
         </p:txBody>
@@ -4122,23 +3947,23 @@
         </p:nvSpPr>
         <p:spPr>
           <a:xfrm>
-            <a:off x="594360" y="1837944"/>
-            <a:ext cx="11002975" cy="685800"/>
-          </a:xfrm>
-          <a:prstGeom prst="rect">
-            <a:avLst/>
-          </a:prstGeom>
-          <a:noFill/>
-        </p:spPr>
-        <p:txBody>
-          <a:bodyPr wrap="square">
-            <a:spAutoFit/>
-          </a:bodyPr>
-          <a:lstStyle/>
-          <a:p>
-            <a:pPr algn="ctr"/>
-            <a:r>
-              <a:rPr sz="4400" b="1" i="0">
+            <a:off x="640080" y="1650492"/>
+            <a:ext cx="10911535" cy="731520"/>
+          </a:xfrm>
+          <a:prstGeom prst="rect">
+            <a:avLst/>
+          </a:prstGeom>
+          <a:noFill/>
+        </p:spPr>
+        <p:txBody>
+          <a:bodyPr wrap="square">
+            <a:spAutoFit/>
+          </a:bodyPr>
+          <a:lstStyle/>
+          <a:p>
+            <a:pPr algn="ctr"/>
+            <a:r>
+              <a:rPr sz="4800" b="1" i="0">
                 <a:solidFill>
                   <a:srgbClr val="FFFFFF"/>
                 </a:solidFill>
@@ -4157,8 +3982,8 @@
         </p:nvSpPr>
         <p:spPr>
           <a:xfrm>
-            <a:off x="594360" y="2560320"/>
-            <a:ext cx="11002975" cy="384048"/>
+            <a:off x="640080" y="2418588"/>
+            <a:ext cx="10911535" cy="365760"/>
           </a:xfrm>
           <a:prstGeom prst="rect">
             <a:avLst/>
@@ -4175,7 +4000,7 @@
             <a:r>
               <a:rPr sz="2400" b="0" i="1">
                 <a:solidFill>
-                  <a:srgbClr val="B4B4B4"/>
+                  <a:srgbClr val="AAAAAA"/>
                 </a:solidFill>
                 <a:latin typeface="Arial"/>
               </a:rPr>
@@ -4192,8 +4017,78 @@
         </p:nvSpPr>
         <p:spPr>
           <a:xfrm>
-            <a:off x="594360" y="2980944"/>
-            <a:ext cx="11002975" cy="347472"/>
+            <a:off x="640080" y="2985516"/>
+            <a:ext cx="10911535" cy="731520"/>
+          </a:xfrm>
+          <a:prstGeom prst="rect">
+            <a:avLst/>
+          </a:prstGeom>
+          <a:noFill/>
+        </p:spPr>
+        <p:txBody>
+          <a:bodyPr wrap="square">
+            <a:spAutoFit/>
+          </a:bodyPr>
+          <a:lstStyle/>
+          <a:p>
+            <a:pPr algn="ctr"/>
+            <a:r>
+              <a:rPr sz="4800" b="1" i="0">
+                <a:solidFill>
+                  <a:srgbClr val="FFFFFF"/>
+                </a:solidFill>
+                <a:latin typeface="Arial"/>
+              </a:rPr>
+              <a:t>恥と 罪に 力 なく</a:t>
+            </a:r>
+          </a:p>
+        </p:txBody>
+      </p:sp>
+      <p:sp>
+        <p:nvSpPr>
+          <p:cNvPr id="5" name="TextBox 4"/>
+          <p:cNvSpPr txBox="1"/>
+          <p:nvPr/>
+        </p:nvSpPr>
+        <p:spPr>
+          <a:xfrm>
+            <a:off x="640080" y="3753612"/>
+            <a:ext cx="10911535" cy="365760"/>
+          </a:xfrm>
+          <a:prstGeom prst="rect">
+            <a:avLst/>
+          </a:prstGeom>
+          <a:noFill/>
+        </p:spPr>
+        <p:txBody>
+          <a:bodyPr wrap="square">
+            <a:spAutoFit/>
+          </a:bodyPr>
+          <a:lstStyle/>
+          <a:p>
+            <a:pPr algn="ctr"/>
+            <a:r>
+              <a:rPr sz="2400" b="0" i="1">
+                <a:solidFill>
+                  <a:srgbClr val="AAAAAA"/>
+                </a:solidFill>
+                <a:latin typeface="Arial"/>
+              </a:rPr>
+              <a:t>hajito tsumini chikara naku</a:t>
+            </a:r>
+          </a:p>
+        </p:txBody>
+      </p:sp>
+      <p:sp>
+        <p:nvSpPr>
+          <p:cNvPr id="6" name="TextBox 5"/>
+          <p:cNvSpPr txBox="1"/>
+          <p:nvPr/>
+        </p:nvSpPr>
+        <p:spPr>
+          <a:xfrm>
+            <a:off x="640080" y="4530852"/>
+            <a:ext cx="10911535" cy="310896"/>
           </a:xfrm>
           <a:prstGeom prst="rect">
             <a:avLst/>
@@ -4210,81 +4105,11 @@
             <a:r>
               <a:rPr sz="2000" b="0" i="1">
                 <a:solidFill>
-                  <a:srgbClr val="8C8C8C"/>
-                </a:solidFill>
-                <a:latin typeface="Arial"/>
-              </a:rPr>
-              <a:t/>
-            </a:r>
-          </a:p>
-        </p:txBody>
-      </p:sp>
-      <p:sp>
-        <p:nvSpPr>
-          <p:cNvPr id="5" name="TextBox 4"/>
-          <p:cNvSpPr txBox="1"/>
-          <p:nvPr/>
-        </p:nvSpPr>
-        <p:spPr>
-          <a:xfrm>
-            <a:off x="594360" y="3529584"/>
-            <a:ext cx="11002975" cy="685800"/>
-          </a:xfrm>
-          <a:prstGeom prst="rect">
-            <a:avLst/>
-          </a:prstGeom>
-          <a:noFill/>
-        </p:spPr>
-        <p:txBody>
-          <a:bodyPr wrap="square">
-            <a:spAutoFit/>
-          </a:bodyPr>
-          <a:lstStyle/>
-          <a:p>
-            <a:pPr algn="ctr"/>
-            <a:r>
-              <a:rPr sz="4400" b="1" i="0">
-                <a:solidFill>
-                  <a:srgbClr val="FFFFFF"/>
-                </a:solidFill>
-                <a:latin typeface="Arial"/>
-              </a:rPr>
-              <a:t>恥と 罪に 力 なく</a:t>
-            </a:r>
-          </a:p>
-        </p:txBody>
-      </p:sp>
-      <p:sp>
-        <p:nvSpPr>
-          <p:cNvPr id="6" name="TextBox 5"/>
-          <p:cNvSpPr txBox="1"/>
-          <p:nvPr/>
-        </p:nvSpPr>
-        <p:spPr>
-          <a:xfrm>
-            <a:off x="594360" y="4251960"/>
-            <a:ext cx="11002975" cy="384048"/>
-          </a:xfrm>
-          <a:prstGeom prst="rect">
-            <a:avLst/>
-          </a:prstGeom>
-          <a:noFill/>
-        </p:spPr>
-        <p:txBody>
-          <a:bodyPr wrap="square">
-            <a:spAutoFit/>
-          </a:bodyPr>
-          <a:lstStyle/>
-          <a:p>
-            <a:pPr algn="ctr"/>
-            <a:r>
-              <a:rPr sz="2400" b="0" i="1">
-                <a:solidFill>
-                  <a:srgbClr val="B4B4B4"/>
-                </a:solidFill>
-                <a:latin typeface="Arial"/>
-              </a:rPr>
-              <a:t>hajito tsumini chikara naku</a:t>
+                  <a:srgbClr val="828282"/>
+                </a:solidFill>
+                <a:latin typeface="Arial"/>
+              </a:rPr>
+              <a:t>E o túmulo foi negado</a:t>
             </a:r>
           </a:p>
         </p:txBody>
@@ -4297,8 +4122,8 @@
         </p:nvSpPr>
         <p:spPr>
           <a:xfrm>
-            <a:off x="594360" y="4672584"/>
-            <a:ext cx="11002975" cy="347472"/>
+            <a:off x="640080" y="4896612"/>
+            <a:ext cx="10911535" cy="310896"/>
           </a:xfrm>
           <a:prstGeom prst="rect">
             <a:avLst/>
@@ -4315,11 +4140,11 @@
             <a:r>
               <a:rPr sz="2000" b="0" i="1">
                 <a:solidFill>
-                  <a:srgbClr val="8C8C8C"/>
-                </a:solidFill>
-                <a:latin typeface="Arial"/>
-              </a:rPr>
-              <a:t/>
+                  <a:srgbClr val="828282"/>
+                </a:solidFill>
+                <a:latin typeface="Arial"/>
+              </a:rPr>
+              <a:t>Jesus vive para sempre</a:t>
             </a:r>
           </a:p>
         </p:txBody>
@@ -4358,23 +4183,23 @@
         </p:nvSpPr>
         <p:spPr>
           <a:xfrm>
-            <a:off x="594360" y="1837944"/>
-            <a:ext cx="11002975" cy="685800"/>
-          </a:xfrm>
-          <a:prstGeom prst="rect">
-            <a:avLst/>
-          </a:prstGeom>
-          <a:noFill/>
-        </p:spPr>
-        <p:txBody>
-          <a:bodyPr wrap="square">
-            <a:spAutoFit/>
-          </a:bodyPr>
-          <a:lstStyle/>
-          <a:p>
-            <a:pPr algn="ctr"/>
-            <a:r>
-              <a:rPr sz="4400" b="1" i="0">
+            <a:off x="640080" y="1650492"/>
+            <a:ext cx="10911535" cy="731520"/>
+          </a:xfrm>
+          <a:prstGeom prst="rect">
+            <a:avLst/>
+          </a:prstGeom>
+          <a:noFill/>
+        </p:spPr>
+        <p:txBody>
+          <a:bodyPr wrap="square">
+            <a:spAutoFit/>
+          </a:bodyPr>
+          <a:lstStyle/>
+          <a:p>
+            <a:pPr algn="ctr"/>
+            <a:r>
+              <a:rPr sz="4800" b="1" i="0">
                 <a:solidFill>
                   <a:srgbClr val="FFFFFF"/>
                 </a:solidFill>
@@ -4393,8 +4218,8 @@
         </p:nvSpPr>
         <p:spPr>
           <a:xfrm>
-            <a:off x="594360" y="2560320"/>
-            <a:ext cx="11002975" cy="384048"/>
+            <a:off x="640080" y="2418588"/>
+            <a:ext cx="10911535" cy="365760"/>
           </a:xfrm>
           <a:prstGeom prst="rect">
             <a:avLst/>
@@ -4411,7 +4236,7 @@
             <a:r>
               <a:rPr sz="2400" b="0" i="1">
                 <a:solidFill>
-                  <a:srgbClr val="B4B4B4"/>
+                  <a:srgbClr val="AAAAAA"/>
                 </a:solidFill>
                 <a:latin typeface="Arial"/>
               </a:rPr>
@@ -4428,8 +4253,78 @@
         </p:nvSpPr>
         <p:spPr>
           <a:xfrm>
-            <a:off x="594360" y="2980944"/>
-            <a:ext cx="11002975" cy="347472"/>
+            <a:off x="640080" y="2985516"/>
+            <a:ext cx="10911535" cy="731520"/>
+          </a:xfrm>
+          <a:prstGeom prst="rect">
+            <a:avLst/>
+          </a:prstGeom>
+          <a:noFill/>
+        </p:spPr>
+        <p:txBody>
+          <a:bodyPr wrap="square">
+            <a:spAutoFit/>
+          </a:bodyPr>
+          <a:lstStyle/>
+          <a:p>
+            <a:pPr algn="ctr"/>
+            <a:r>
+              <a:rPr sz="4800" b="1" i="0">
+                <a:solidFill>
+                  <a:srgbClr val="FFFFFF"/>
+                </a:solidFill>
+                <a:latin typeface="Arial"/>
+              </a:rPr>
+              <a:t>よみ がえりの 王イエス</a:t>
+            </a:r>
+          </a:p>
+        </p:txBody>
+      </p:sp>
+      <p:sp>
+        <p:nvSpPr>
+          <p:cNvPr id="5" name="TextBox 4"/>
+          <p:cNvSpPr txBox="1"/>
+          <p:nvPr/>
+        </p:nvSpPr>
+        <p:spPr>
+          <a:xfrm>
+            <a:off x="640080" y="3753612"/>
+            <a:ext cx="10911535" cy="365760"/>
+          </a:xfrm>
+          <a:prstGeom prst="rect">
+            <a:avLst/>
+          </a:prstGeom>
+          <a:noFill/>
+        </p:spPr>
+        <p:txBody>
+          <a:bodyPr wrap="square">
+            <a:spAutoFit/>
+          </a:bodyPr>
+          <a:lstStyle/>
+          <a:p>
+            <a:pPr algn="ctr"/>
+            <a:r>
+              <a:rPr sz="2400" b="0" i="1">
+                <a:solidFill>
+                  <a:srgbClr val="AAAAAA"/>
+                </a:solidFill>
+                <a:latin typeface="Arial"/>
+              </a:rPr>
+              <a:t>yomi gaerino o-o iesu</a:t>
+            </a:r>
+          </a:p>
+        </p:txBody>
+      </p:sp>
+      <p:sp>
+        <p:nvSpPr>
+          <p:cNvPr id="6" name="TextBox 5"/>
+          <p:cNvSpPr txBox="1"/>
+          <p:nvPr/>
+        </p:nvSpPr>
+        <p:spPr>
+          <a:xfrm>
+            <a:off x="640080" y="4530852"/>
+            <a:ext cx="10911535" cy="310896"/>
           </a:xfrm>
           <a:prstGeom prst="rect">
             <a:avLst/>
@@ -4446,81 +4341,11 @@
             <a:r>
               <a:rPr sz="2000" b="0" i="1">
                 <a:solidFill>
-                  <a:srgbClr val="8C8C8C"/>
-                </a:solidFill>
-                <a:latin typeface="Arial"/>
-              </a:rPr>
-              <a:t/>
-            </a:r>
-          </a:p>
-        </p:txBody>
-      </p:sp>
-      <p:sp>
-        <p:nvSpPr>
-          <p:cNvPr id="5" name="TextBox 4"/>
-          <p:cNvSpPr txBox="1"/>
-          <p:nvPr/>
-        </p:nvSpPr>
-        <p:spPr>
-          <a:xfrm>
-            <a:off x="594360" y="3529584"/>
-            <a:ext cx="11002975" cy="685800"/>
-          </a:xfrm>
-          <a:prstGeom prst="rect">
-            <a:avLst/>
-          </a:prstGeom>
-          <a:noFill/>
-        </p:spPr>
-        <p:txBody>
-          <a:bodyPr wrap="square">
-            <a:spAutoFit/>
-          </a:bodyPr>
-          <a:lstStyle/>
-          <a:p>
-            <a:pPr algn="ctr"/>
-            <a:r>
-              <a:rPr sz="4400" b="1" i="0">
-                <a:solidFill>
-                  <a:srgbClr val="FFFFFF"/>
-                </a:solidFill>
-                <a:latin typeface="Arial"/>
-              </a:rPr>
-              <a:t>よみ がえりの 王イエス</a:t>
-            </a:r>
-          </a:p>
-        </p:txBody>
-      </p:sp>
-      <p:sp>
-        <p:nvSpPr>
-          <p:cNvPr id="6" name="TextBox 5"/>
-          <p:cNvSpPr txBox="1"/>
-          <p:nvPr/>
-        </p:nvSpPr>
-        <p:spPr>
-          <a:xfrm>
-            <a:off x="594360" y="4251960"/>
-            <a:ext cx="11002975" cy="384048"/>
-          </a:xfrm>
-          <a:prstGeom prst="rect">
-            <a:avLst/>
-          </a:prstGeom>
-          <a:noFill/>
-        </p:spPr>
-        <p:txBody>
-          <a:bodyPr wrap="square">
-            <a:spAutoFit/>
-          </a:bodyPr>
-          <a:lstStyle/>
-          <a:p>
-            <a:pPr algn="ctr"/>
-            <a:r>
-              <a:rPr sz="2400" b="0" i="1">
-                <a:solidFill>
-                  <a:srgbClr val="B4B4B4"/>
-                </a:solidFill>
-                <a:latin typeface="Arial"/>
-              </a:rPr>
-              <a:t>yomi gaerino o-o iesu</a:t>
+                  <a:srgbClr val="828282"/>
+                </a:solidFill>
+                <a:latin typeface="Arial"/>
+              </a:rPr>
+              <a:t>Ele está vivo</a:t>
             </a:r>
           </a:p>
         </p:txBody>
@@ -4533,8 +4358,8 @@
         </p:nvSpPr>
         <p:spPr>
           <a:xfrm>
-            <a:off x="594360" y="4672584"/>
-            <a:ext cx="11002975" cy="347472"/>
+            <a:off x="640080" y="4896612"/>
+            <a:ext cx="10911535" cy="310896"/>
           </a:xfrm>
           <a:prstGeom prst="rect">
             <a:avLst/>
@@ -4551,11 +4376,11 @@
             <a:r>
               <a:rPr sz="2000" b="0" i="1">
                 <a:solidFill>
-                  <a:srgbClr val="8C8C8C"/>
-                </a:solidFill>
-                <a:latin typeface="Arial"/>
-              </a:rPr>
-              <a:t/>
+                  <a:srgbClr val="828282"/>
+                </a:solidFill>
+                <a:latin typeface="Arial"/>
+              </a:rPr>
+              <a:t>Ele está vivo</a:t>
             </a:r>
           </a:p>
         </p:txBody>
@@ -4594,23 +4419,23 @@
         </p:nvSpPr>
         <p:spPr>
           <a:xfrm>
-            <a:off x="594360" y="2258568"/>
-            <a:ext cx="11002975" cy="685800"/>
-          </a:xfrm>
-          <a:prstGeom prst="rect">
-            <a:avLst/>
-          </a:prstGeom>
-          <a:noFill/>
-        </p:spPr>
-        <p:txBody>
-          <a:bodyPr wrap="square">
-            <a:spAutoFit/>
-          </a:bodyPr>
-          <a:lstStyle/>
-          <a:p>
-            <a:pPr algn="ctr"/>
-            <a:r>
-              <a:rPr sz="4400" b="1" i="0">
+            <a:off x="640080" y="2052828"/>
+            <a:ext cx="10911535" cy="731520"/>
+          </a:xfrm>
+          <a:prstGeom prst="rect">
+            <a:avLst/>
+          </a:prstGeom>
+          <a:noFill/>
+        </p:spPr>
+        <p:txBody>
+          <a:bodyPr wrap="square">
+            <a:spAutoFit/>
+          </a:bodyPr>
+          <a:lstStyle/>
+          <a:p>
+            <a:pPr algn="ctr"/>
+            <a:r>
+              <a:rPr sz="4800" b="1" i="0">
                 <a:solidFill>
                   <a:srgbClr val="FFFFFF"/>
                 </a:solidFill>
@@ -4629,99 +4454,29 @@
         </p:nvSpPr>
         <p:spPr>
           <a:xfrm>
-            <a:off x="594360" y="2980944"/>
-            <a:ext cx="11002975" cy="347472"/>
-          </a:xfrm>
-          <a:prstGeom prst="rect">
-            <a:avLst/>
-          </a:prstGeom>
-          <a:noFill/>
-        </p:spPr>
-        <p:txBody>
-          <a:bodyPr wrap="square">
-            <a:spAutoFit/>
-          </a:bodyPr>
-          <a:lstStyle/>
-          <a:p>
-            <a:pPr algn="ctr"/>
-            <a:r>
-              <a:rPr sz="2200" b="0" i="1">
-                <a:solidFill>
-                  <a:srgbClr val="8C8C8C"/>
-                </a:solidFill>
-                <a:latin typeface="Arial"/>
-              </a:rPr>
-              <a:t/>
-            </a:r>
-          </a:p>
-        </p:txBody>
-      </p:sp>
-      <p:sp>
-        <p:nvSpPr>
-          <p:cNvPr id="4" name="TextBox 3"/>
-          <p:cNvSpPr txBox="1"/>
-          <p:nvPr/>
-        </p:nvSpPr>
-        <p:spPr>
-          <a:xfrm>
-            <a:off x="594360" y="3529584"/>
-            <a:ext cx="11002975" cy="685800"/>
-          </a:xfrm>
-          <a:prstGeom prst="rect">
-            <a:avLst/>
-          </a:prstGeom>
-          <a:noFill/>
-        </p:spPr>
-        <p:txBody>
-          <a:bodyPr wrap="square">
-            <a:spAutoFit/>
-          </a:bodyPr>
-          <a:lstStyle/>
-          <a:p>
-            <a:pPr algn="ctr"/>
-            <a:r>
-              <a:rPr sz="4400" b="1" i="0">
+            <a:off x="640080" y="2985516"/>
+            <a:ext cx="10911535" cy="731520"/>
+          </a:xfrm>
+          <a:prstGeom prst="rect">
+            <a:avLst/>
+          </a:prstGeom>
+          <a:noFill/>
+        </p:spPr>
+        <p:txBody>
+          <a:bodyPr wrap="square">
+            <a:spAutoFit/>
+          </a:bodyPr>
+          <a:lstStyle/>
+          <a:p>
+            <a:pPr algn="ctr"/>
+            <a:r>
+              <a:rPr sz="4800" b="1" i="0">
                 <a:solidFill>
                   <a:srgbClr val="FFFFFF"/>
                 </a:solidFill>
                 <a:latin typeface="Arial"/>
               </a:rPr>
               <a:t>Jesus está vivo</a:t>
-            </a:r>
-          </a:p>
-        </p:txBody>
-      </p:sp>
-      <p:sp>
-        <p:nvSpPr>
-          <p:cNvPr id="5" name="TextBox 4"/>
-          <p:cNvSpPr txBox="1"/>
-          <p:nvPr/>
-        </p:nvSpPr>
-        <p:spPr>
-          <a:xfrm>
-            <a:off x="594360" y="4251960"/>
-            <a:ext cx="11002975" cy="347472"/>
-          </a:xfrm>
-          <a:prstGeom prst="rect">
-            <a:avLst/>
-          </a:prstGeom>
-          <a:noFill/>
-        </p:spPr>
-        <p:txBody>
-          <a:bodyPr wrap="square">
-            <a:spAutoFit/>
-          </a:bodyPr>
-          <a:lstStyle/>
-          <a:p>
-            <a:pPr algn="ctr"/>
-            <a:r>
-              <a:rPr sz="2200" b="0" i="1">
-                <a:solidFill>
-                  <a:srgbClr val="8C8C8C"/>
-                </a:solidFill>
-                <a:latin typeface="Arial"/>
-              </a:rPr>
-              <a:t/>
             </a:r>
           </a:p>
         </p:txBody>
@@ -4760,23 +4515,23 @@
         </p:nvSpPr>
         <p:spPr>
           <a:xfrm>
-            <a:off x="594360" y="2258568"/>
-            <a:ext cx="11002975" cy="685800"/>
-          </a:xfrm>
-          <a:prstGeom prst="rect">
-            <a:avLst/>
-          </a:prstGeom>
-          <a:noFill/>
-        </p:spPr>
-        <p:txBody>
-          <a:bodyPr wrap="square">
-            <a:spAutoFit/>
-          </a:bodyPr>
-          <a:lstStyle/>
-          <a:p>
-            <a:pPr algn="ctr"/>
-            <a:r>
-              <a:rPr sz="4400" b="1" i="0">
+            <a:off x="640080" y="2052828"/>
+            <a:ext cx="10911535" cy="731520"/>
+          </a:xfrm>
+          <a:prstGeom prst="rect">
+            <a:avLst/>
+          </a:prstGeom>
+          <a:noFill/>
+        </p:spPr>
+        <p:txBody>
+          <a:bodyPr wrap="square">
+            <a:spAutoFit/>
+          </a:bodyPr>
+          <a:lstStyle/>
+          <a:p>
+            <a:pPr algn="ctr"/>
+            <a:r>
+              <a:rPr sz="4800" b="1" i="0">
                 <a:solidFill>
                   <a:srgbClr val="FFFFFF"/>
                 </a:solidFill>
@@ -4795,99 +4550,29 @@
         </p:nvSpPr>
         <p:spPr>
           <a:xfrm>
-            <a:off x="594360" y="2980944"/>
-            <a:ext cx="11002975" cy="347472"/>
-          </a:xfrm>
-          <a:prstGeom prst="rect">
-            <a:avLst/>
-          </a:prstGeom>
-          <a:noFill/>
-        </p:spPr>
-        <p:txBody>
-          <a:bodyPr wrap="square">
-            <a:spAutoFit/>
-          </a:bodyPr>
-          <a:lstStyle/>
-          <a:p>
-            <a:pPr algn="ctr"/>
-            <a:r>
-              <a:rPr sz="2200" b="0" i="1">
-                <a:solidFill>
-                  <a:srgbClr val="8C8C8C"/>
-                </a:solidFill>
-                <a:latin typeface="Arial"/>
-              </a:rPr>
-              <a:t/>
-            </a:r>
-          </a:p>
-        </p:txBody>
-      </p:sp>
-      <p:sp>
-        <p:nvSpPr>
-          <p:cNvPr id="4" name="TextBox 3"/>
-          <p:cNvSpPr txBox="1"/>
-          <p:nvPr/>
-        </p:nvSpPr>
-        <p:spPr>
-          <a:xfrm>
-            <a:off x="594360" y="3529584"/>
-            <a:ext cx="11002975" cy="685800"/>
-          </a:xfrm>
-          <a:prstGeom prst="rect">
-            <a:avLst/>
-          </a:prstGeom>
-          <a:noFill/>
-        </p:spPr>
-        <p:txBody>
-          <a:bodyPr wrap="square">
-            <a:spAutoFit/>
-          </a:bodyPr>
-          <a:lstStyle/>
-          <a:p>
-            <a:pPr algn="ctr"/>
-            <a:r>
-              <a:rPr sz="4400" b="1" i="0">
+            <a:off x="640080" y="2985516"/>
+            <a:ext cx="10911535" cy="731520"/>
+          </a:xfrm>
+          <a:prstGeom prst="rect">
+            <a:avLst/>
+          </a:prstGeom>
+          <a:noFill/>
+        </p:spPr>
+        <p:txBody>
+          <a:bodyPr wrap="square">
+            <a:spAutoFit/>
+          </a:bodyPr>
+          <a:lstStyle/>
+          <a:p>
+            <a:pPr algn="ctr"/>
+            <a:r>
+              <a:rPr sz="4800" b="1" i="0">
                 <a:solidFill>
                   <a:srgbClr val="FFFFFF"/>
                 </a:solidFill>
                 <a:latin typeface="Arial"/>
               </a:rPr>
               <a:t>Jesus está vivo</a:t>
-            </a:r>
-          </a:p>
-        </p:txBody>
-      </p:sp>
-      <p:sp>
-        <p:nvSpPr>
-          <p:cNvPr id="5" name="TextBox 4"/>
-          <p:cNvSpPr txBox="1"/>
-          <p:nvPr/>
-        </p:nvSpPr>
-        <p:spPr>
-          <a:xfrm>
-            <a:off x="594360" y="4251960"/>
-            <a:ext cx="11002975" cy="347472"/>
-          </a:xfrm>
-          <a:prstGeom prst="rect">
-            <a:avLst/>
-          </a:prstGeom>
-          <a:noFill/>
-        </p:spPr>
-        <p:txBody>
-          <a:bodyPr wrap="square">
-            <a:spAutoFit/>
-          </a:bodyPr>
-          <a:lstStyle/>
-          <a:p>
-            <a:pPr algn="ctr"/>
-            <a:r>
-              <a:rPr sz="2200" b="0" i="1">
-                <a:solidFill>
-                  <a:srgbClr val="8C8C8C"/>
-                </a:solidFill>
-                <a:latin typeface="Arial"/>
-              </a:rPr>
-              <a:t/>
             </a:r>
           </a:p>
         </p:txBody>
@@ -4926,64 +4611,29 @@
         </p:nvSpPr>
         <p:spPr>
           <a:xfrm>
-            <a:off x="594360" y="2894076"/>
-            <a:ext cx="11002975" cy="685800"/>
-          </a:xfrm>
-          <a:prstGeom prst="rect">
-            <a:avLst/>
-          </a:prstGeom>
-          <a:noFill/>
-        </p:spPr>
-        <p:txBody>
-          <a:bodyPr wrap="square">
-            <a:spAutoFit/>
-          </a:bodyPr>
-          <a:lstStyle/>
-          <a:p>
-            <a:pPr algn="ctr"/>
-            <a:r>
-              <a:rPr sz="4400" b="1" i="0">
+            <a:off x="640080" y="2702052"/>
+            <a:ext cx="10911535" cy="731520"/>
+          </a:xfrm>
+          <a:prstGeom prst="rect">
+            <a:avLst/>
+          </a:prstGeom>
+          <a:noFill/>
+        </p:spPr>
+        <p:txBody>
+          <a:bodyPr wrap="square">
+            <a:spAutoFit/>
+          </a:bodyPr>
+          <a:lstStyle/>
+          <a:p>
+            <a:pPr algn="ctr"/>
+            <a:r>
+              <a:rPr sz="4800" b="1" i="0">
                 <a:solidFill>
                   <a:srgbClr val="FFFFFF"/>
                 </a:solidFill>
                 <a:latin typeface="Arial"/>
               </a:rPr>
               <a:t>Jesus está vivo</a:t>
-            </a:r>
-          </a:p>
-        </p:txBody>
-      </p:sp>
-      <p:sp>
-        <p:nvSpPr>
-          <p:cNvPr id="3" name="TextBox 2"/>
-          <p:cNvSpPr txBox="1"/>
-          <p:nvPr/>
-        </p:nvSpPr>
-        <p:spPr>
-          <a:xfrm>
-            <a:off x="594360" y="3616452"/>
-            <a:ext cx="11002975" cy="347472"/>
-          </a:xfrm>
-          <a:prstGeom prst="rect">
-            <a:avLst/>
-          </a:prstGeom>
-          <a:noFill/>
-        </p:spPr>
-        <p:txBody>
-          <a:bodyPr wrap="square">
-            <a:spAutoFit/>
-          </a:bodyPr>
-          <a:lstStyle/>
-          <a:p>
-            <a:pPr algn="ctr"/>
-            <a:r>
-              <a:rPr sz="2200" b="0" i="1">
-                <a:solidFill>
-                  <a:srgbClr val="8C8C8C"/>
-                </a:solidFill>
-                <a:latin typeface="Arial"/>
-              </a:rPr>
-              <a:t/>
             </a:r>
           </a:p>
         </p:txBody>
@@ -5022,23 +4672,23 @@
         </p:nvSpPr>
         <p:spPr>
           <a:xfrm>
-            <a:off x="594360" y="1837944"/>
-            <a:ext cx="11002975" cy="685800"/>
-          </a:xfrm>
-          <a:prstGeom prst="rect">
-            <a:avLst/>
-          </a:prstGeom>
-          <a:noFill/>
-        </p:spPr>
-        <p:txBody>
-          <a:bodyPr wrap="square">
-            <a:spAutoFit/>
-          </a:bodyPr>
-          <a:lstStyle/>
-          <a:p>
-            <a:pPr algn="ctr"/>
-            <a:r>
-              <a:rPr sz="4400" b="1" i="0">
+            <a:off x="640080" y="1650492"/>
+            <a:ext cx="10911535" cy="731520"/>
+          </a:xfrm>
+          <a:prstGeom prst="rect">
+            <a:avLst/>
+          </a:prstGeom>
+          <a:noFill/>
+        </p:spPr>
+        <p:txBody>
+          <a:bodyPr wrap="square">
+            <a:spAutoFit/>
+          </a:bodyPr>
+          <a:lstStyle/>
+          <a:p>
+            <a:pPr algn="ctr"/>
+            <a:r>
+              <a:rPr sz="4800" b="1" i="0">
                 <a:solidFill>
                   <a:srgbClr val="FFFFFF"/>
                 </a:solidFill>
@@ -5057,8 +4707,8 @@
         </p:nvSpPr>
         <p:spPr>
           <a:xfrm>
-            <a:off x="594360" y="2560320"/>
-            <a:ext cx="11002975" cy="384048"/>
+            <a:off x="640080" y="2418588"/>
+            <a:ext cx="10911535" cy="365760"/>
           </a:xfrm>
           <a:prstGeom prst="rect">
             <a:avLst/>
@@ -5075,7 +4725,7 @@
             <a:r>
               <a:rPr sz="2400" b="0" i="1">
                 <a:solidFill>
-                  <a:srgbClr val="B4B4B4"/>
+                  <a:srgbClr val="AAAAAA"/>
                 </a:solidFill>
                 <a:latin typeface="Arial"/>
               </a:rPr>
@@ -5092,8 +4742,78 @@
         </p:nvSpPr>
         <p:spPr>
           <a:xfrm>
-            <a:off x="594360" y="2980944"/>
-            <a:ext cx="11002975" cy="347472"/>
+            <a:off x="640080" y="2985516"/>
+            <a:ext cx="10911535" cy="731520"/>
+          </a:xfrm>
+          <a:prstGeom prst="rect">
+            <a:avLst/>
+          </a:prstGeom>
+          <a:noFill/>
+        </p:spPr>
+        <p:txBody>
+          <a:bodyPr wrap="square">
+            <a:spAutoFit/>
+          </a:bodyPr>
+          <a:lstStyle/>
+          <a:p>
+            <a:pPr algn="ctr"/>
+            <a:r>
+              <a:rPr sz="4800" b="1" i="0">
+                <a:solidFill>
+                  <a:srgbClr val="FFFFFF"/>
+                </a:solidFill>
+                <a:latin typeface="Arial"/>
+              </a:rPr>
+              <a:t>見よ からになった墓を</a:t>
+            </a:r>
+          </a:p>
+        </p:txBody>
+      </p:sp>
+      <p:sp>
+        <p:nvSpPr>
+          <p:cNvPr id="5" name="TextBox 4"/>
+          <p:cNvSpPr txBox="1"/>
+          <p:nvPr/>
+        </p:nvSpPr>
+        <p:spPr>
+          <a:xfrm>
+            <a:off x="640080" y="3753612"/>
+            <a:ext cx="10911535" cy="365760"/>
+          </a:xfrm>
+          <a:prstGeom prst="rect">
+            <a:avLst/>
+          </a:prstGeom>
+          <a:noFill/>
+        </p:spPr>
+        <p:txBody>
+          <a:bodyPr wrap="square">
+            <a:spAutoFit/>
+          </a:bodyPr>
+          <a:lstStyle/>
+          <a:p>
+            <a:pPr algn="ctr"/>
+            <a:r>
+              <a:rPr sz="2400" b="0" i="1">
+                <a:solidFill>
+                  <a:srgbClr val="AAAAAA"/>
+                </a:solidFill>
+                <a:latin typeface="Arial"/>
+              </a:rPr>
+              <a:t>miyo karani naa--ta haka wo</a:t>
+            </a:r>
+          </a:p>
+        </p:txBody>
+      </p:sp>
+      <p:sp>
+        <p:nvSpPr>
+          <p:cNvPr id="6" name="TextBox 5"/>
+          <p:cNvSpPr txBox="1"/>
+          <p:nvPr/>
+        </p:nvSpPr>
+        <p:spPr>
+          <a:xfrm>
+            <a:off x="640080" y="4530852"/>
+            <a:ext cx="10911535" cy="310896"/>
           </a:xfrm>
           <a:prstGeom prst="rect">
             <a:avLst/>
@@ -5110,7 +4830,7 @@
             <a:r>
               <a:rPr sz="2000" b="0" i="1">
                 <a:solidFill>
-                  <a:srgbClr val="8C8C8C"/>
+                  <a:srgbClr val="828282"/>
                 </a:solidFill>
                 <a:latin typeface="Arial"/>
               </a:rPr>
@@ -5121,84 +4841,14 @@
       </p:sp>
       <p:sp>
         <p:nvSpPr>
-          <p:cNvPr id="5" name="TextBox 4"/>
-          <p:cNvSpPr txBox="1"/>
-          <p:nvPr/>
-        </p:nvSpPr>
-        <p:spPr>
-          <a:xfrm>
-            <a:off x="594360" y="3529584"/>
-            <a:ext cx="11002975" cy="685800"/>
-          </a:xfrm>
-          <a:prstGeom prst="rect">
-            <a:avLst/>
-          </a:prstGeom>
-          <a:noFill/>
-        </p:spPr>
-        <p:txBody>
-          <a:bodyPr wrap="square">
-            <a:spAutoFit/>
-          </a:bodyPr>
-          <a:lstStyle/>
-          <a:p>
-            <a:pPr algn="ctr"/>
-            <a:r>
-              <a:rPr sz="4400" b="1" i="0">
-                <a:solidFill>
-                  <a:srgbClr val="FFFFFF"/>
-                </a:solidFill>
-                <a:latin typeface="Arial"/>
-              </a:rPr>
-              <a:t>見よ からになった墓を</a:t>
-            </a:r>
-          </a:p>
-        </p:txBody>
-      </p:sp>
-      <p:sp>
-        <p:nvSpPr>
-          <p:cNvPr id="6" name="TextBox 5"/>
-          <p:cNvSpPr txBox="1"/>
-          <p:nvPr/>
-        </p:nvSpPr>
-        <p:spPr>
-          <a:xfrm>
-            <a:off x="594360" y="4251960"/>
-            <a:ext cx="11002975" cy="384048"/>
-          </a:xfrm>
-          <a:prstGeom prst="rect">
-            <a:avLst/>
-          </a:prstGeom>
-          <a:noFill/>
-        </p:spPr>
-        <p:txBody>
-          <a:bodyPr wrap="square">
-            <a:spAutoFit/>
-          </a:bodyPr>
-          <a:lstStyle/>
-          <a:p>
-            <a:pPr algn="ctr"/>
-            <a:r>
-              <a:rPr sz="2400" b="0" i="1">
-                <a:solidFill>
-                  <a:srgbClr val="B4B4B4"/>
-                </a:solidFill>
-                <a:latin typeface="Arial"/>
-              </a:rPr>
-              <a:t>miyo karani naa--ta haka wo</a:t>
-            </a:r>
-          </a:p>
-        </p:txBody>
-      </p:sp>
-      <p:sp>
-        <p:nvSpPr>
           <p:cNvPr id="7" name="TextBox 6"/>
           <p:cNvSpPr txBox="1"/>
           <p:nvPr/>
         </p:nvSpPr>
         <p:spPr>
           <a:xfrm>
-            <a:off x="594360" y="4672584"/>
-            <a:ext cx="11002975" cy="347472"/>
+            <a:off x="640080" y="4896612"/>
+            <a:ext cx="10911535" cy="310896"/>
           </a:xfrm>
           <a:prstGeom prst="rect">
             <a:avLst/>
@@ -5215,7 +4865,7 @@
             <a:r>
               <a:rPr sz="2000" b="0" i="1">
                 <a:solidFill>
-                  <a:srgbClr val="8C8C8C"/>
+                  <a:srgbClr val="828282"/>
                 </a:solidFill>
                 <a:latin typeface="Arial"/>
               </a:rPr>
@@ -5258,23 +4908,23 @@
         </p:nvSpPr>
         <p:spPr>
           <a:xfrm>
-            <a:off x="594360" y="2258568"/>
-            <a:ext cx="11002975" cy="685800"/>
-          </a:xfrm>
-          <a:prstGeom prst="rect">
-            <a:avLst/>
-          </a:prstGeom>
-          <a:noFill/>
-        </p:spPr>
-        <p:txBody>
-          <a:bodyPr wrap="square">
-            <a:spAutoFit/>
-          </a:bodyPr>
-          <a:lstStyle/>
-          <a:p>
-            <a:pPr algn="ctr"/>
-            <a:r>
-              <a:rPr sz="4400" b="1" i="0">
+            <a:off x="640080" y="2052828"/>
+            <a:ext cx="10911535" cy="731520"/>
+          </a:xfrm>
+          <a:prstGeom prst="rect">
+            <a:avLst/>
+          </a:prstGeom>
+          <a:noFill/>
+        </p:spPr>
+        <p:txBody>
+          <a:bodyPr wrap="square">
+            <a:spAutoFit/>
+          </a:bodyPr>
+          <a:lstStyle/>
+          <a:p>
+            <a:pPr algn="ctr"/>
+            <a:r>
+              <a:rPr sz="4800" b="1" i="0">
                 <a:solidFill>
                   <a:srgbClr val="FFFFFF"/>
                 </a:solidFill>
@@ -5293,25 +4943,60 @@
         </p:nvSpPr>
         <p:spPr>
           <a:xfrm>
-            <a:off x="594360" y="2980944"/>
-            <a:ext cx="11002975" cy="347472"/>
-          </a:xfrm>
-          <a:prstGeom prst="rect">
-            <a:avLst/>
-          </a:prstGeom>
-          <a:noFill/>
-        </p:spPr>
-        <p:txBody>
-          <a:bodyPr wrap="square">
-            <a:spAutoFit/>
-          </a:bodyPr>
-          <a:lstStyle/>
-          <a:p>
-            <a:pPr algn="ctr"/>
-            <a:r>
-              <a:rPr sz="2200" b="0" i="1">
-                <a:solidFill>
-                  <a:srgbClr val="8C8C8C"/>
+            <a:off x="640080" y="2985516"/>
+            <a:ext cx="10911535" cy="731520"/>
+          </a:xfrm>
+          <a:prstGeom prst="rect">
+            <a:avLst/>
+          </a:prstGeom>
+          <a:noFill/>
+        </p:spPr>
+        <p:txBody>
+          <a:bodyPr wrap="square">
+            <a:spAutoFit/>
+          </a:bodyPr>
+          <a:lstStyle/>
+          <a:p>
+            <a:pPr algn="ctr"/>
+            <a:r>
+              <a:rPr sz="4600" b="1" i="0">
+                <a:solidFill>
+                  <a:srgbClr val="FFFFFF"/>
+                </a:solidFill>
+                <a:latin typeface="Arial"/>
+              </a:rPr>
+              <a:t>A maldição do pecado foi quebrada</a:t>
+            </a:r>
+          </a:p>
+        </p:txBody>
+      </p:sp>
+      <p:sp>
+        <p:nvSpPr>
+          <p:cNvPr id="4" name="TextBox 3"/>
+          <p:cNvSpPr txBox="1"/>
+          <p:nvPr/>
+        </p:nvSpPr>
+        <p:spPr>
+          <a:xfrm>
+            <a:off x="640080" y="4128516"/>
+            <a:ext cx="10911535" cy="310896"/>
+          </a:xfrm>
+          <a:prstGeom prst="rect">
+            <a:avLst/>
+          </a:prstGeom>
+          <a:noFill/>
+        </p:spPr>
+        <p:txBody>
+          <a:bodyPr wrap="square">
+            <a:spAutoFit/>
+          </a:bodyPr>
+          <a:lstStyle/>
+          <a:p>
+            <a:pPr algn="ctr"/>
+            <a:r>
+              <a:rPr sz="2000" b="0" i="0">
+                <a:solidFill>
+                  <a:srgbClr val="828282"/>
                 </a:solidFill>
                 <a:latin typeface="Arial"/>
               </a:rPr>
@@ -5322,66 +5007,31 @@
       </p:sp>
       <p:sp>
         <p:nvSpPr>
-          <p:cNvPr id="4" name="TextBox 3"/>
-          <p:cNvSpPr txBox="1"/>
-          <p:nvPr/>
-        </p:nvSpPr>
-        <p:spPr>
-          <a:xfrm>
-            <a:off x="594360" y="3529584"/>
-            <a:ext cx="11002975" cy="685800"/>
-          </a:xfrm>
-          <a:prstGeom prst="rect">
-            <a:avLst/>
-          </a:prstGeom>
-          <a:noFill/>
-        </p:spPr>
-        <p:txBody>
-          <a:bodyPr wrap="square">
-            <a:spAutoFit/>
-          </a:bodyPr>
-          <a:lstStyle/>
-          <a:p>
-            <a:pPr algn="ctr"/>
-            <a:r>
-              <a:rPr sz="4266" b="1" i="0">
-                <a:solidFill>
-                  <a:srgbClr val="FFFFFF"/>
-                </a:solidFill>
-                <a:latin typeface="Arial"/>
-              </a:rPr>
-              <a:t>A maldição do pecado foi quebrada</a:t>
-            </a:r>
-          </a:p>
-        </p:txBody>
-      </p:sp>
-      <p:sp>
-        <p:nvSpPr>
           <p:cNvPr id="5" name="TextBox 4"/>
           <p:cNvSpPr txBox="1"/>
           <p:nvPr/>
         </p:nvSpPr>
         <p:spPr>
           <a:xfrm>
-            <a:off x="594360" y="4251960"/>
-            <a:ext cx="11002975" cy="347472"/>
-          </a:xfrm>
-          <a:prstGeom prst="rect">
-            <a:avLst/>
-          </a:prstGeom>
-          <a:noFill/>
-        </p:spPr>
-        <p:txBody>
-          <a:bodyPr wrap="square">
-            <a:spAutoFit/>
-          </a:bodyPr>
-          <a:lstStyle/>
-          <a:p>
-            <a:pPr algn="ctr"/>
-            <a:r>
-              <a:rPr sz="2200" b="0" i="1">
-                <a:solidFill>
-                  <a:srgbClr val="8C8C8C"/>
+            <a:off x="640080" y="4494276"/>
+            <a:ext cx="10911535" cy="310896"/>
+          </a:xfrm>
+          <a:prstGeom prst="rect">
+            <a:avLst/>
+          </a:prstGeom>
+          <a:noFill/>
+        </p:spPr>
+        <p:txBody>
+          <a:bodyPr wrap="square">
+            <a:spAutoFit/>
+          </a:bodyPr>
+          <a:lstStyle/>
+          <a:p>
+            <a:pPr algn="ctr"/>
+            <a:r>
+              <a:rPr sz="2000" b="0" i="0">
+                <a:solidFill>
+                  <a:srgbClr val="828282"/>
                 </a:solidFill>
                 <a:latin typeface="Arial"/>
               </a:rPr>
@@ -5424,23 +5074,23 @@
         </p:nvSpPr>
         <p:spPr>
           <a:xfrm>
-            <a:off x="594360" y="2258568"/>
-            <a:ext cx="11002975" cy="685800"/>
-          </a:xfrm>
-          <a:prstGeom prst="rect">
-            <a:avLst/>
-          </a:prstGeom>
-          <a:noFill/>
-        </p:spPr>
-        <p:txBody>
-          <a:bodyPr wrap="square">
-            <a:spAutoFit/>
-          </a:bodyPr>
-          <a:lstStyle/>
-          <a:p>
-            <a:pPr algn="ctr"/>
-            <a:r>
-              <a:rPr sz="4400" b="1" i="0">
+            <a:off x="640080" y="2052828"/>
+            <a:ext cx="10911535" cy="731520"/>
+          </a:xfrm>
+          <a:prstGeom prst="rect">
+            <a:avLst/>
+          </a:prstGeom>
+          <a:noFill/>
+        </p:spPr>
+        <p:txBody>
+          <a:bodyPr wrap="square">
+            <a:spAutoFit/>
+          </a:bodyPr>
+          <a:lstStyle/>
+          <a:p>
+            <a:pPr algn="ctr"/>
+            <a:r>
+              <a:rPr sz="4800" b="1" i="0">
                 <a:solidFill>
                   <a:srgbClr val="FFFFFF"/>
                 </a:solidFill>
@@ -5459,25 +5109,60 @@
         </p:nvSpPr>
         <p:spPr>
           <a:xfrm>
-            <a:off x="594360" y="2980944"/>
-            <a:ext cx="11002975" cy="347472"/>
-          </a:xfrm>
-          <a:prstGeom prst="rect">
-            <a:avLst/>
-          </a:prstGeom>
-          <a:noFill/>
-        </p:spPr>
-        <p:txBody>
-          <a:bodyPr wrap="square">
-            <a:spAutoFit/>
-          </a:bodyPr>
-          <a:lstStyle/>
-          <a:p>
-            <a:pPr algn="ctr"/>
-            <a:r>
-              <a:rPr sz="2200" b="0" i="1">
-                <a:solidFill>
-                  <a:srgbClr val="8C8C8C"/>
+            <a:off x="640080" y="2985516"/>
+            <a:ext cx="10911535" cy="731520"/>
+          </a:xfrm>
+          <a:prstGeom prst="rect">
+            <a:avLst/>
+          </a:prstGeom>
+          <a:noFill/>
+        </p:spPr>
+        <p:txBody>
+          <a:bodyPr wrap="square">
+            <a:spAutoFit/>
+          </a:bodyPr>
+          <a:lstStyle/>
+          <a:p>
+            <a:pPr algn="ctr"/>
+            <a:r>
+              <a:rPr sz="4800" b="1" i="0">
+                <a:solidFill>
+                  <a:srgbClr val="FFFFFF"/>
+                </a:solidFill>
+                <a:latin typeface="Arial"/>
+              </a:rPr>
+              <a:t>O Cordeiro de Deus ressuscitou</a:t>
+            </a:r>
+          </a:p>
+        </p:txBody>
+      </p:sp>
+      <p:sp>
+        <p:nvSpPr>
+          <p:cNvPr id="4" name="TextBox 3"/>
+          <p:cNvSpPr txBox="1"/>
+          <p:nvPr/>
+        </p:nvSpPr>
+        <p:spPr>
+          <a:xfrm>
+            <a:off x="640080" y="4128516"/>
+            <a:ext cx="10911535" cy="310896"/>
+          </a:xfrm>
+          <a:prstGeom prst="rect">
+            <a:avLst/>
+          </a:prstGeom>
+          <a:noFill/>
+        </p:spPr>
+        <p:txBody>
+          <a:bodyPr wrap="square">
+            <a:spAutoFit/>
+          </a:bodyPr>
+          <a:lstStyle/>
+          <a:p>
+            <a:pPr algn="ctr"/>
+            <a:r>
+              <a:rPr sz="2000" b="0" i="0">
+                <a:solidFill>
+                  <a:srgbClr val="828282"/>
                 </a:solidFill>
                 <a:latin typeface="Arial"/>
               </a:rPr>
@@ -5488,66 +5173,31 @@
       </p:sp>
       <p:sp>
         <p:nvSpPr>
-          <p:cNvPr id="4" name="TextBox 3"/>
-          <p:cNvSpPr txBox="1"/>
-          <p:nvPr/>
-        </p:nvSpPr>
-        <p:spPr>
-          <a:xfrm>
-            <a:off x="594360" y="3529584"/>
-            <a:ext cx="11002975" cy="685800"/>
-          </a:xfrm>
-          <a:prstGeom prst="rect">
-            <a:avLst/>
-          </a:prstGeom>
-          <a:noFill/>
-        </p:spPr>
-        <p:txBody>
-          <a:bodyPr wrap="square">
-            <a:spAutoFit/>
-          </a:bodyPr>
-          <a:lstStyle/>
-          <a:p>
-            <a:pPr algn="ctr"/>
-            <a:r>
-              <a:rPr sz="4400" b="1" i="0">
-                <a:solidFill>
-                  <a:srgbClr val="FFFFFF"/>
-                </a:solidFill>
-                <a:latin typeface="Arial"/>
-              </a:rPr>
-              <a:t>O Cordeiro de Deus ressuscitou</a:t>
-            </a:r>
-          </a:p>
-        </p:txBody>
-      </p:sp>
-      <p:sp>
-        <p:nvSpPr>
           <p:cNvPr id="5" name="TextBox 4"/>
           <p:cNvSpPr txBox="1"/>
           <p:nvPr/>
         </p:nvSpPr>
         <p:spPr>
           <a:xfrm>
-            <a:off x="594360" y="4251960"/>
-            <a:ext cx="11002975" cy="347472"/>
-          </a:xfrm>
-          <a:prstGeom prst="rect">
-            <a:avLst/>
-          </a:prstGeom>
-          <a:noFill/>
-        </p:spPr>
-        <p:txBody>
-          <a:bodyPr wrap="square">
-            <a:spAutoFit/>
-          </a:bodyPr>
-          <a:lstStyle/>
-          <a:p>
-            <a:pPr algn="ctr"/>
-            <a:r>
-              <a:rPr sz="2200" b="0" i="1">
-                <a:solidFill>
-                  <a:srgbClr val="8C8C8C"/>
+            <a:off x="640080" y="4494276"/>
+            <a:ext cx="10911535" cy="310896"/>
+          </a:xfrm>
+          <a:prstGeom prst="rect">
+            <a:avLst/>
+          </a:prstGeom>
+          <a:noFill/>
+        </p:spPr>
+        <p:txBody>
+          <a:bodyPr wrap="square">
+            <a:spAutoFit/>
+          </a:bodyPr>
+          <a:lstStyle/>
+          <a:p>
+            <a:pPr algn="ctr"/>
+            <a:r>
+              <a:rPr sz="2000" b="0" i="0">
+                <a:solidFill>
+                  <a:srgbClr val="828282"/>
                 </a:solidFill>
                 <a:latin typeface="Arial"/>
               </a:rPr>
@@ -5590,23 +5240,23 @@
         </p:nvSpPr>
         <p:spPr>
           <a:xfrm>
-            <a:off x="594360" y="2258568"/>
-            <a:ext cx="11002975" cy="685800"/>
-          </a:xfrm>
-          <a:prstGeom prst="rect">
-            <a:avLst/>
-          </a:prstGeom>
-          <a:noFill/>
-        </p:spPr>
-        <p:txBody>
-          <a:bodyPr wrap="square">
-            <a:spAutoFit/>
-          </a:bodyPr>
-          <a:lstStyle/>
-          <a:p>
-            <a:pPr algn="ctr"/>
-            <a:r>
-              <a:rPr sz="4400" b="1" i="0">
+            <a:off x="640080" y="2052828"/>
+            <a:ext cx="10911535" cy="731520"/>
+          </a:xfrm>
+          <a:prstGeom prst="rect">
+            <a:avLst/>
+          </a:prstGeom>
+          <a:noFill/>
+        </p:spPr>
+        <p:txBody>
+          <a:bodyPr wrap="square">
+            <a:spAutoFit/>
+          </a:bodyPr>
+          <a:lstStyle/>
+          <a:p>
+            <a:pPr algn="ctr"/>
+            <a:r>
+              <a:rPr sz="4800" b="1" i="0">
                 <a:solidFill>
                   <a:srgbClr val="FFFFFF"/>
                 </a:solidFill>
@@ -5625,99 +5275,29 @@
         </p:nvSpPr>
         <p:spPr>
           <a:xfrm>
-            <a:off x="594360" y="2980944"/>
-            <a:ext cx="11002975" cy="347472"/>
-          </a:xfrm>
-          <a:prstGeom prst="rect">
-            <a:avLst/>
-          </a:prstGeom>
-          <a:noFill/>
-        </p:spPr>
-        <p:txBody>
-          <a:bodyPr wrap="square">
-            <a:spAutoFit/>
-          </a:bodyPr>
-          <a:lstStyle/>
-          <a:p>
-            <a:pPr algn="ctr"/>
-            <a:r>
-              <a:rPr sz="2200" b="0" i="1">
-                <a:solidFill>
-                  <a:srgbClr val="8C8C8C"/>
-                </a:solidFill>
-                <a:latin typeface="Arial"/>
-              </a:rPr>
-              <a:t/>
-            </a:r>
-          </a:p>
-        </p:txBody>
-      </p:sp>
-      <p:sp>
-        <p:nvSpPr>
-          <p:cNvPr id="4" name="TextBox 3"/>
-          <p:cNvSpPr txBox="1"/>
-          <p:nvPr/>
-        </p:nvSpPr>
-        <p:spPr>
-          <a:xfrm>
-            <a:off x="594360" y="3529584"/>
-            <a:ext cx="11002975" cy="685800"/>
-          </a:xfrm>
-          <a:prstGeom prst="rect">
-            <a:avLst/>
-          </a:prstGeom>
-          <a:noFill/>
-        </p:spPr>
-        <p:txBody>
-          <a:bodyPr wrap="square">
-            <a:spAutoFit/>
-          </a:bodyPr>
-          <a:lstStyle/>
-          <a:p>
-            <a:pPr algn="ctr"/>
-            <a:r>
-              <a:rPr sz="4400" b="1" i="0">
+            <a:off x="640080" y="2985516"/>
+            <a:ext cx="10911535" cy="731520"/>
+          </a:xfrm>
+          <a:prstGeom prst="rect">
+            <a:avLst/>
+          </a:prstGeom>
+          <a:noFill/>
+        </p:spPr>
+        <p:txBody>
+          <a:bodyPr wrap="square">
+            <a:spAutoFit/>
+          </a:bodyPr>
+          <a:lstStyle/>
+          <a:p>
+            <a:pPr algn="ctr"/>
+            <a:r>
+              <a:rPr sz="4800" b="1" i="0">
                 <a:solidFill>
                   <a:srgbClr val="FFFFFF"/>
                 </a:solidFill>
                 <a:latin typeface="Arial"/>
               </a:rPr>
               <a:t>Ele está vivo</a:t>
-            </a:r>
-          </a:p>
-        </p:txBody>
-      </p:sp>
-      <p:sp>
-        <p:nvSpPr>
-          <p:cNvPr id="5" name="TextBox 4"/>
-          <p:cNvSpPr txBox="1"/>
-          <p:nvPr/>
-        </p:nvSpPr>
-        <p:spPr>
-          <a:xfrm>
-            <a:off x="594360" y="4251960"/>
-            <a:ext cx="11002975" cy="347472"/>
-          </a:xfrm>
-          <a:prstGeom prst="rect">
-            <a:avLst/>
-          </a:prstGeom>
-          <a:noFill/>
-        </p:spPr>
-        <p:txBody>
-          <a:bodyPr wrap="square">
-            <a:spAutoFit/>
-          </a:bodyPr>
-          <a:lstStyle/>
-          <a:p>
-            <a:pPr algn="ctr"/>
-            <a:r>
-              <a:rPr sz="2200" b="0" i="1">
-                <a:solidFill>
-                  <a:srgbClr val="8C8C8C"/>
-                </a:solidFill>
-                <a:latin typeface="Arial"/>
-              </a:rPr>
-              <a:t/>
             </a:r>
           </a:p>
         </p:txBody>
@@ -5756,23 +5336,23 @@
         </p:nvSpPr>
         <p:spPr>
           <a:xfrm>
-            <a:off x="594360" y="1837944"/>
-            <a:ext cx="11002975" cy="685800"/>
-          </a:xfrm>
-          <a:prstGeom prst="rect">
-            <a:avLst/>
-          </a:prstGeom>
-          <a:noFill/>
-        </p:spPr>
-        <p:txBody>
-          <a:bodyPr wrap="square">
-            <a:spAutoFit/>
-          </a:bodyPr>
-          <a:lstStyle/>
-          <a:p>
-            <a:pPr algn="ctr"/>
-            <a:r>
-              <a:rPr sz="4400" b="1" i="0">
+            <a:off x="640080" y="1650492"/>
+            <a:ext cx="10911535" cy="731520"/>
+          </a:xfrm>
+          <a:prstGeom prst="rect">
+            <a:avLst/>
+          </a:prstGeom>
+          <a:noFill/>
+        </p:spPr>
+        <p:txBody>
+          <a:bodyPr wrap="square">
+            <a:spAutoFit/>
+          </a:bodyPr>
+          <a:lstStyle/>
+          <a:p>
+            <a:pPr algn="ctr"/>
+            <a:r>
+              <a:rPr sz="4800" b="1" i="0">
                 <a:solidFill>
                   <a:srgbClr val="FFFFFF"/>
                 </a:solidFill>
@@ -5791,8 +5371,8 @@
         </p:nvSpPr>
         <p:spPr>
           <a:xfrm>
-            <a:off x="594360" y="2560320"/>
-            <a:ext cx="11002975" cy="384048"/>
+            <a:off x="640080" y="2418588"/>
+            <a:ext cx="10911535" cy="365760"/>
           </a:xfrm>
           <a:prstGeom prst="rect">
             <a:avLst/>
@@ -5809,7 +5389,7 @@
             <a:r>
               <a:rPr sz="2400" b="0" i="1">
                 <a:solidFill>
-                  <a:srgbClr val="B4B4B4"/>
+                  <a:srgbClr val="AAAAAA"/>
                 </a:solidFill>
                 <a:latin typeface="Arial"/>
               </a:rPr>
@@ -5826,8 +5406,78 @@
         </p:nvSpPr>
         <p:spPr>
           <a:xfrm>
-            <a:off x="594360" y="2980944"/>
-            <a:ext cx="11002975" cy="347472"/>
+            <a:off x="640080" y="2985516"/>
+            <a:ext cx="10911535" cy="731520"/>
+          </a:xfrm>
+          <a:prstGeom prst="rect">
+            <a:avLst/>
+          </a:prstGeom>
+          <a:noFill/>
+        </p:spPr>
+        <p:txBody>
+          <a:bodyPr wrap="square">
+            <a:spAutoFit/>
+          </a:bodyPr>
+          <a:lstStyle/>
+          <a:p>
+            <a:pPr algn="ctr"/>
+            <a:r>
+              <a:rPr sz="4800" b="1" i="0">
+                <a:solidFill>
+                  <a:srgbClr val="FFFFFF"/>
+                </a:solidFill>
+                <a:latin typeface="Arial"/>
+              </a:rPr>
+              <a:t>叫べ われら の    王イェスは 生きている!</a:t>
+            </a:r>
+          </a:p>
+        </p:txBody>
+      </p:sp>
+      <p:sp>
+        <p:nvSpPr>
+          <p:cNvPr id="5" name="TextBox 4"/>
+          <p:cNvSpPr txBox="1"/>
+          <p:nvPr/>
+        </p:nvSpPr>
+        <p:spPr>
+          <a:xfrm>
+            <a:off x="640080" y="3753612"/>
+            <a:ext cx="10911535" cy="365760"/>
+          </a:xfrm>
+          <a:prstGeom prst="rect">
+            <a:avLst/>
+          </a:prstGeom>
+          <a:noFill/>
+        </p:spPr>
+        <p:txBody>
+          <a:bodyPr wrap="square">
+            <a:spAutoFit/>
+          </a:bodyPr>
+          <a:lstStyle/>
+          <a:p>
+            <a:pPr algn="ctr"/>
+            <a:r>
+              <a:rPr sz="2400" b="0" i="1">
+                <a:solidFill>
+                  <a:srgbClr val="AAAAAA"/>
+                </a:solidFill>
+                <a:latin typeface="Arial"/>
+              </a:rPr>
+              <a:t>sakebe warera no oh iesu wa i-kite-iru</a:t>
+            </a:r>
+          </a:p>
+        </p:txBody>
+      </p:sp>
+      <p:sp>
+        <p:nvSpPr>
+          <p:cNvPr id="6" name="TextBox 5"/>
+          <p:cNvSpPr txBox="1"/>
+          <p:nvPr/>
+        </p:nvSpPr>
+        <p:spPr>
+          <a:xfrm>
+            <a:off x="640080" y="4530852"/>
+            <a:ext cx="10911535" cy="310896"/>
           </a:xfrm>
           <a:prstGeom prst="rect">
             <a:avLst/>
@@ -5844,7 +5494,7 @@
             <a:r>
               <a:rPr sz="2000" b="0" i="1">
                 <a:solidFill>
-                  <a:srgbClr val="8C8C8C"/>
+                  <a:srgbClr val="828282"/>
                 </a:solidFill>
                 <a:latin typeface="Arial"/>
               </a:rPr>
@@ -5855,84 +5505,14 @@
       </p:sp>
       <p:sp>
         <p:nvSpPr>
-          <p:cNvPr id="5" name="TextBox 4"/>
-          <p:cNvSpPr txBox="1"/>
-          <p:nvPr/>
-        </p:nvSpPr>
-        <p:spPr>
-          <a:xfrm>
-            <a:off x="594360" y="3529584"/>
-            <a:ext cx="11002975" cy="685800"/>
-          </a:xfrm>
-          <a:prstGeom prst="rect">
-            <a:avLst/>
-          </a:prstGeom>
-          <a:noFill/>
-        </p:spPr>
-        <p:txBody>
-          <a:bodyPr wrap="square">
-            <a:spAutoFit/>
-          </a:bodyPr>
-          <a:lstStyle/>
-          <a:p>
-            <a:pPr algn="ctr"/>
-            <a:r>
-              <a:rPr sz="4400" b="1" i="0">
-                <a:solidFill>
-                  <a:srgbClr val="FFFFFF"/>
-                </a:solidFill>
-                <a:latin typeface="Arial"/>
-              </a:rPr>
-              <a:t>叫べ われら の    王イェスは 生きている!</a:t>
-            </a:r>
-          </a:p>
-        </p:txBody>
-      </p:sp>
-      <p:sp>
-        <p:nvSpPr>
-          <p:cNvPr id="6" name="TextBox 5"/>
-          <p:cNvSpPr txBox="1"/>
-          <p:nvPr/>
-        </p:nvSpPr>
-        <p:spPr>
-          <a:xfrm>
-            <a:off x="594360" y="4251960"/>
-            <a:ext cx="11002975" cy="384048"/>
-          </a:xfrm>
-          <a:prstGeom prst="rect">
-            <a:avLst/>
-          </a:prstGeom>
-          <a:noFill/>
-        </p:spPr>
-        <p:txBody>
-          <a:bodyPr wrap="square">
-            <a:spAutoFit/>
-          </a:bodyPr>
-          <a:lstStyle/>
-          <a:p>
-            <a:pPr algn="ctr"/>
-            <a:r>
-              <a:rPr sz="2400" b="0" i="1">
-                <a:solidFill>
-                  <a:srgbClr val="B4B4B4"/>
-                </a:solidFill>
-                <a:latin typeface="Arial"/>
-              </a:rPr>
-              <a:t>sakebe warera no oh iesu wa i-kite-iru</a:t>
-            </a:r>
-          </a:p>
-        </p:txBody>
-      </p:sp>
-      <p:sp>
-        <p:nvSpPr>
           <p:cNvPr id="7" name="TextBox 6"/>
           <p:cNvSpPr txBox="1"/>
           <p:nvPr/>
         </p:nvSpPr>
         <p:spPr>
           <a:xfrm>
-            <a:off x="594360" y="4672584"/>
-            <a:ext cx="11002975" cy="347472"/>
+            <a:off x="640080" y="4896612"/>
+            <a:ext cx="10911535" cy="310896"/>
           </a:xfrm>
           <a:prstGeom prst="rect">
             <a:avLst/>
@@ -5949,7 +5529,7 @@
             <a:r>
               <a:rPr sz="2000" b="0" i="1">
                 <a:solidFill>
-                  <a:srgbClr val="8C8C8C"/>
+                  <a:srgbClr val="828282"/>
                 </a:solidFill>
                 <a:latin typeface="Arial"/>
               </a:rPr>
@@ -5992,23 +5572,23 @@
         </p:nvSpPr>
         <p:spPr>
           <a:xfrm>
-            <a:off x="594360" y="1837944"/>
-            <a:ext cx="11002975" cy="685800"/>
-          </a:xfrm>
-          <a:prstGeom prst="rect">
-            <a:avLst/>
-          </a:prstGeom>
-          <a:noFill/>
-        </p:spPr>
-        <p:txBody>
-          <a:bodyPr wrap="square">
-            <a:spAutoFit/>
-          </a:bodyPr>
-          <a:lstStyle/>
-          <a:p>
-            <a:pPr algn="ctr"/>
-            <a:r>
-              <a:rPr sz="4400" b="1" i="0">
+            <a:off x="640080" y="1650492"/>
+            <a:ext cx="10911535" cy="731520"/>
+          </a:xfrm>
+          <a:prstGeom prst="rect">
+            <a:avLst/>
+          </a:prstGeom>
+          <a:noFill/>
+        </p:spPr>
+        <p:txBody>
+          <a:bodyPr wrap="square">
+            <a:spAutoFit/>
+          </a:bodyPr>
+          <a:lstStyle/>
+          <a:p>
+            <a:pPr algn="ctr"/>
+            <a:r>
+              <a:rPr sz="4800" b="1" i="0">
                 <a:solidFill>
                   <a:srgbClr val="FFFFFF"/>
                 </a:solidFill>
@@ -6027,8 +5607,8 @@
         </p:nvSpPr>
         <p:spPr>
           <a:xfrm>
-            <a:off x="594360" y="2560320"/>
-            <a:ext cx="11002975" cy="384048"/>
+            <a:off x="640080" y="2418588"/>
+            <a:ext cx="10911535" cy="365760"/>
           </a:xfrm>
           <a:prstGeom prst="rect">
             <a:avLst/>
@@ -6045,7 +5625,7 @@
             <a:r>
               <a:rPr sz="2400" b="0" i="1">
                 <a:solidFill>
-                  <a:srgbClr val="B4B4B4"/>
+                  <a:srgbClr val="AAAAAA"/>
                 </a:solidFill>
                 <a:latin typeface="Arial"/>
               </a:rPr>
@@ -6062,8 +5642,78 @@
         </p:nvSpPr>
         <p:spPr>
           <a:xfrm>
-            <a:off x="594360" y="2980944"/>
-            <a:ext cx="11002975" cy="347472"/>
+            <a:off x="640080" y="2985516"/>
+            <a:ext cx="10911535" cy="731520"/>
+          </a:xfrm>
+          <a:prstGeom prst="rect">
+            <a:avLst/>
+          </a:prstGeom>
+          <a:noFill/>
+        </p:spPr>
+        <p:txBody>
+          <a:bodyPr wrap="square">
+            <a:spAutoFit/>
+          </a:bodyPr>
+          <a:lstStyle/>
+          <a:p>
+            <a:pPr algn="ctr"/>
+            <a:r>
+              <a:rPr sz="4800" b="1" i="0">
+                <a:solidFill>
+                  <a:srgbClr val="FFFFFF"/>
+                </a:solidFill>
+                <a:latin typeface="Arial"/>
+              </a:rPr>
+              <a:t>生ける水が ここにある</a:t>
+            </a:r>
+          </a:p>
+        </p:txBody>
+      </p:sp>
+      <p:sp>
+        <p:nvSpPr>
+          <p:cNvPr id="5" name="TextBox 4"/>
+          <p:cNvSpPr txBox="1"/>
+          <p:nvPr/>
+        </p:nvSpPr>
+        <p:spPr>
+          <a:xfrm>
+            <a:off x="640080" y="3753612"/>
+            <a:ext cx="10911535" cy="365760"/>
+          </a:xfrm>
+          <a:prstGeom prst="rect">
+            <a:avLst/>
+          </a:prstGeom>
+          <a:noFill/>
+        </p:spPr>
+        <p:txBody>
+          <a:bodyPr wrap="square">
+            <a:spAutoFit/>
+          </a:bodyPr>
+          <a:lstStyle/>
+          <a:p>
+            <a:pPr algn="ctr"/>
+            <a:r>
+              <a:rPr sz="2400" b="0" i="1">
+                <a:solidFill>
+                  <a:srgbClr val="AAAAAA"/>
+                </a:solidFill>
+                <a:latin typeface="Arial"/>
+              </a:rPr>
+              <a:t>ikeru mizuga kokoni aru</a:t>
+            </a:r>
+          </a:p>
+        </p:txBody>
+      </p:sp>
+      <p:sp>
+        <p:nvSpPr>
+          <p:cNvPr id="6" name="TextBox 5"/>
+          <p:cNvSpPr txBox="1"/>
+          <p:nvPr/>
+        </p:nvSpPr>
+        <p:spPr>
+          <a:xfrm>
+            <a:off x="640080" y="4530852"/>
+            <a:ext cx="10911535" cy="310896"/>
           </a:xfrm>
           <a:prstGeom prst="rect">
             <a:avLst/>
@@ -6080,81 +5730,11 @@
             <a:r>
               <a:rPr sz="2000" b="0" i="1">
                 <a:solidFill>
-                  <a:srgbClr val="8C8C8C"/>
-                </a:solidFill>
-                <a:latin typeface="Arial"/>
-              </a:rPr>
-              <a:t/>
-            </a:r>
-          </a:p>
-        </p:txBody>
-      </p:sp>
-      <p:sp>
-        <p:nvSpPr>
-          <p:cNvPr id="5" name="TextBox 4"/>
-          <p:cNvSpPr txBox="1"/>
-          <p:nvPr/>
-        </p:nvSpPr>
-        <p:spPr>
-          <a:xfrm>
-            <a:off x="594360" y="3529584"/>
-            <a:ext cx="11002975" cy="685800"/>
-          </a:xfrm>
-          <a:prstGeom prst="rect">
-            <a:avLst/>
-          </a:prstGeom>
-          <a:noFill/>
-        </p:spPr>
-        <p:txBody>
-          <a:bodyPr wrap="square">
-            <a:spAutoFit/>
-          </a:bodyPr>
-          <a:lstStyle/>
-          <a:p>
-            <a:pPr algn="ctr"/>
-            <a:r>
-              <a:rPr sz="4400" b="1" i="0">
-                <a:solidFill>
-                  <a:srgbClr val="FFFFFF"/>
-                </a:solidFill>
-                <a:latin typeface="Arial"/>
-              </a:rPr>
-              <a:t>生ける水が ここにある</a:t>
-            </a:r>
-          </a:p>
-        </p:txBody>
-      </p:sp>
-      <p:sp>
-        <p:nvSpPr>
-          <p:cNvPr id="6" name="TextBox 5"/>
-          <p:cNvSpPr txBox="1"/>
-          <p:nvPr/>
-        </p:nvSpPr>
-        <p:spPr>
-          <a:xfrm>
-            <a:off x="594360" y="4251960"/>
-            <a:ext cx="11002975" cy="384048"/>
-          </a:xfrm>
-          <a:prstGeom prst="rect">
-            <a:avLst/>
-          </a:prstGeom>
-          <a:noFill/>
-        </p:spPr>
-        <p:txBody>
-          <a:bodyPr wrap="square">
-            <a:spAutoFit/>
-          </a:bodyPr>
-          <a:lstStyle/>
-          <a:p>
-            <a:pPr algn="ctr"/>
-            <a:r>
-              <a:rPr sz="2400" b="0" i="1">
-                <a:solidFill>
-                  <a:srgbClr val="B4B4B4"/>
-                </a:solidFill>
-                <a:latin typeface="Arial"/>
-              </a:rPr>
-              <a:t>ikeru mizuga kokoni aru</a:t>
+                  <a:srgbClr val="828282"/>
+                </a:solidFill>
+                <a:latin typeface="Arial"/>
+              </a:rPr>
+              <a:t>Jesus Está Vivo</a:t>
             </a:r>
           </a:p>
         </p:txBody>
@@ -6167,8 +5747,8 @@
         </p:nvSpPr>
         <p:spPr>
           <a:xfrm>
-            <a:off x="594360" y="4672584"/>
-            <a:ext cx="11002975" cy="347472"/>
+            <a:off x="640080" y="4896612"/>
+            <a:ext cx="10911535" cy="310896"/>
           </a:xfrm>
           <a:prstGeom prst="rect">
             <a:avLst/>
@@ -6185,11 +5765,11 @@
             <a:r>
               <a:rPr sz="2000" b="0" i="1">
                 <a:solidFill>
-                  <a:srgbClr val="8C8C8C"/>
-                </a:solidFill>
-                <a:latin typeface="Arial"/>
-              </a:rPr>
-              <a:t/>
+                  <a:srgbClr val="828282"/>
+                </a:solidFill>
+                <a:latin typeface="Arial"/>
+              </a:rPr>
+              <a:t>Jesus está vivo</a:t>
             </a:r>
           </a:p>
         </p:txBody>
@@ -6228,23 +5808,23 @@
         </p:nvSpPr>
         <p:spPr>
           <a:xfrm>
-            <a:off x="594360" y="1837944"/>
-            <a:ext cx="11002975" cy="685800"/>
-          </a:xfrm>
-          <a:prstGeom prst="rect">
-            <a:avLst/>
-          </a:prstGeom>
-          <a:noFill/>
-        </p:spPr>
-        <p:txBody>
-          <a:bodyPr wrap="square">
-            <a:spAutoFit/>
-          </a:bodyPr>
-          <a:lstStyle/>
-          <a:p>
-            <a:pPr algn="ctr"/>
-            <a:r>
-              <a:rPr sz="4400" b="1" i="0">
+            <a:off x="640080" y="1650492"/>
+            <a:ext cx="10911535" cy="731520"/>
+          </a:xfrm>
+          <a:prstGeom prst="rect">
+            <a:avLst/>
+          </a:prstGeom>
+          <a:noFill/>
+        </p:spPr>
+        <p:txBody>
+          <a:bodyPr wrap="square">
+            <a:spAutoFit/>
+          </a:bodyPr>
+          <a:lstStyle/>
+          <a:p>
+            <a:pPr algn="ctr"/>
+            <a:r>
+              <a:rPr sz="4800" b="1" i="0">
                 <a:solidFill>
                   <a:srgbClr val="FFFFFF"/>
                 </a:solidFill>
@@ -6263,8 +5843,8 @@
         </p:nvSpPr>
         <p:spPr>
           <a:xfrm>
-            <a:off x="594360" y="2560320"/>
-            <a:ext cx="11002975" cy="384048"/>
+            <a:off x="640080" y="2418588"/>
+            <a:ext cx="10911535" cy="365760"/>
           </a:xfrm>
           <a:prstGeom prst="rect">
             <a:avLst/>
@@ -6281,7 +5861,7 @@
             <a:r>
               <a:rPr sz="2400" b="0" i="1">
                 <a:solidFill>
-                  <a:srgbClr val="B4B4B4"/>
+                  <a:srgbClr val="AAAAAA"/>
                 </a:solidFill>
                 <a:latin typeface="Arial"/>
               </a:rPr>
@@ -6298,8 +5878,78 @@
         </p:nvSpPr>
         <p:spPr>
           <a:xfrm>
-            <a:off x="594360" y="2980944"/>
-            <a:ext cx="11002975" cy="347472"/>
+            <a:off x="640080" y="2985516"/>
+            <a:ext cx="10911535" cy="731520"/>
+          </a:xfrm>
+          <a:prstGeom prst="rect">
+            <a:avLst/>
+          </a:prstGeom>
+          <a:noFill/>
+        </p:spPr>
+        <p:txBody>
+          <a:bodyPr wrap="square">
+            <a:spAutoFit/>
+          </a:bodyPr>
+          <a:lstStyle/>
+          <a:p>
+            <a:pPr algn="ctr"/>
+            <a:r>
+              <a:rPr sz="4800" b="1" i="0">
+                <a:solidFill>
+                  <a:srgbClr val="FFFFFF"/>
+                </a:solidFill>
+                <a:latin typeface="Arial"/>
+              </a:rPr>
+              <a:t>世に勝る 王は ここに</a:t>
+            </a:r>
+          </a:p>
+        </p:txBody>
+      </p:sp>
+      <p:sp>
+        <p:nvSpPr>
+          <p:cNvPr id="5" name="TextBox 4"/>
+          <p:cNvSpPr txBox="1"/>
+          <p:nvPr/>
+        </p:nvSpPr>
+        <p:spPr>
+          <a:xfrm>
+            <a:off x="640080" y="3753612"/>
+            <a:ext cx="10911535" cy="365760"/>
+          </a:xfrm>
+          <a:prstGeom prst="rect">
+            <a:avLst/>
+          </a:prstGeom>
+          <a:noFill/>
+        </p:spPr>
+        <p:txBody>
+          <a:bodyPr wrap="square">
+            <a:spAutoFit/>
+          </a:bodyPr>
+          <a:lstStyle/>
+          <a:p>
+            <a:pPr algn="ctr"/>
+            <a:r>
+              <a:rPr sz="2400" b="0" i="1">
+                <a:solidFill>
+                  <a:srgbClr val="AAAAAA"/>
+                </a:solidFill>
+                <a:latin typeface="Arial"/>
+              </a:rPr>
+              <a:t>yoni masaru ouwa kokoni</a:t>
+            </a:r>
+          </a:p>
+        </p:txBody>
+      </p:sp>
+      <p:sp>
+        <p:nvSpPr>
+          <p:cNvPr id="6" name="TextBox 5"/>
+          <p:cNvSpPr txBox="1"/>
+          <p:nvPr/>
+        </p:nvSpPr>
+        <p:spPr>
+          <a:xfrm>
+            <a:off x="640080" y="4530852"/>
+            <a:ext cx="10911535" cy="310896"/>
           </a:xfrm>
           <a:prstGeom prst="rect">
             <a:avLst/>
@@ -6316,81 +5966,11 @@
             <a:r>
               <a:rPr sz="2000" b="0" i="1">
                 <a:solidFill>
-                  <a:srgbClr val="8C8C8C"/>
-                </a:solidFill>
-                <a:latin typeface="Arial"/>
-              </a:rPr>
-              <a:t/>
-            </a:r>
-          </a:p>
-        </p:txBody>
-      </p:sp>
-      <p:sp>
-        <p:nvSpPr>
-          <p:cNvPr id="5" name="TextBox 4"/>
-          <p:cNvSpPr txBox="1"/>
-          <p:nvPr/>
-        </p:nvSpPr>
-        <p:spPr>
-          <a:xfrm>
-            <a:off x="594360" y="3529584"/>
-            <a:ext cx="11002975" cy="685800"/>
-          </a:xfrm>
-          <a:prstGeom prst="rect">
-            <a:avLst/>
-          </a:prstGeom>
-          <a:noFill/>
-        </p:spPr>
-        <p:txBody>
-          <a:bodyPr wrap="square">
-            <a:spAutoFit/>
-          </a:bodyPr>
-          <a:lstStyle/>
-          <a:p>
-            <a:pPr algn="ctr"/>
-            <a:r>
-              <a:rPr sz="4400" b="1" i="0">
-                <a:solidFill>
-                  <a:srgbClr val="FFFFFF"/>
-                </a:solidFill>
-                <a:latin typeface="Arial"/>
-              </a:rPr>
-              <a:t>世に勝る 王は ここに</a:t>
-            </a:r>
-          </a:p>
-        </p:txBody>
-      </p:sp>
-      <p:sp>
-        <p:nvSpPr>
-          <p:cNvPr id="6" name="TextBox 5"/>
-          <p:cNvSpPr txBox="1"/>
-          <p:nvPr/>
-        </p:nvSpPr>
-        <p:spPr>
-          <a:xfrm>
-            <a:off x="594360" y="4251960"/>
-            <a:ext cx="11002975" cy="384048"/>
-          </a:xfrm>
-          <a:prstGeom prst="rect">
-            <a:avLst/>
-          </a:prstGeom>
-          <a:noFill/>
-        </p:spPr>
-        <p:txBody>
-          <a:bodyPr wrap="square">
-            <a:spAutoFit/>
-          </a:bodyPr>
-          <a:lstStyle/>
-          <a:p>
-            <a:pPr algn="ctr"/>
-            <a:r>
-              <a:rPr sz="2400" b="0" i="1">
-                <a:solidFill>
-                  <a:srgbClr val="B4B4B4"/>
-                </a:solidFill>
-                <a:latin typeface="Arial"/>
-              </a:rPr>
-              <a:t>yoni masaru ouwa kokoni</a:t>
+                  <a:srgbClr val="828282"/>
+                </a:solidFill>
+                <a:latin typeface="Arial"/>
+              </a:rPr>
+              <a:t>Aleluia</a:t>
             </a:r>
           </a:p>
         </p:txBody>
@@ -6403,8 +5983,8 @@
         </p:nvSpPr>
         <p:spPr>
           <a:xfrm>
-            <a:off x="594360" y="4672584"/>
-            <a:ext cx="11002975" cy="347472"/>
+            <a:off x="640080" y="4896612"/>
+            <a:ext cx="10911535" cy="310896"/>
           </a:xfrm>
           <a:prstGeom prst="rect">
             <a:avLst/>
@@ -6421,11 +6001,11 @@
             <a:r>
               <a:rPr sz="2000" b="0" i="1">
                 <a:solidFill>
-                  <a:srgbClr val="8C8C8C"/>
-                </a:solidFill>
-                <a:latin typeface="Arial"/>
-              </a:rPr>
-              <a:t/>
+                  <a:srgbClr val="828282"/>
+                </a:solidFill>
+                <a:latin typeface="Arial"/>
+              </a:rPr>
+              <a:t>Jesus está vivo</a:t>
             </a:r>
           </a:p>
         </p:txBody>
@@ -6464,23 +6044,23 @@
         </p:nvSpPr>
         <p:spPr>
           <a:xfrm>
-            <a:off x="594360" y="1837944"/>
-            <a:ext cx="11002975" cy="685800"/>
-          </a:xfrm>
-          <a:prstGeom prst="rect">
-            <a:avLst/>
-          </a:prstGeom>
-          <a:noFill/>
-        </p:spPr>
-        <p:txBody>
-          <a:bodyPr wrap="square">
-            <a:spAutoFit/>
-          </a:bodyPr>
-          <a:lstStyle/>
-          <a:p>
-            <a:pPr algn="ctr"/>
-            <a:r>
-              <a:rPr sz="4400" b="1" i="0">
+            <a:off x="640080" y="1650492"/>
+            <a:ext cx="10911535" cy="731520"/>
+          </a:xfrm>
+          <a:prstGeom prst="rect">
+            <a:avLst/>
+          </a:prstGeom>
+          <a:noFill/>
+        </p:spPr>
+        <p:txBody>
+          <a:bodyPr wrap="square">
+            <a:spAutoFit/>
+          </a:bodyPr>
+          <a:lstStyle/>
+          <a:p>
+            <a:pPr algn="ctr"/>
+            <a:r>
+              <a:rPr sz="4800" b="1" i="0">
                 <a:solidFill>
                   <a:srgbClr val="FFFFFF"/>
                 </a:solidFill>
@@ -6499,8 +6079,8 @@
         </p:nvSpPr>
         <p:spPr>
           <a:xfrm>
-            <a:off x="594360" y="2560320"/>
-            <a:ext cx="11002975" cy="384048"/>
+            <a:off x="640080" y="2418588"/>
+            <a:ext cx="10911535" cy="365760"/>
           </a:xfrm>
           <a:prstGeom prst="rect">
             <a:avLst/>
@@ -6517,7 +6097,7 @@
             <a:r>
               <a:rPr sz="2400" b="0" i="1">
                 <a:solidFill>
-                  <a:srgbClr val="B4B4B4"/>
+                  <a:srgbClr val="AAAAAA"/>
                 </a:solidFill>
                 <a:latin typeface="Arial"/>
               </a:rPr>
@@ -6534,8 +6114,78 @@
         </p:nvSpPr>
         <p:spPr>
           <a:xfrm>
-            <a:off x="594360" y="2980944"/>
-            <a:ext cx="11002975" cy="347472"/>
+            <a:off x="640080" y="2985516"/>
+            <a:ext cx="10911535" cy="731520"/>
+          </a:xfrm>
+          <a:prstGeom prst="rect">
+            <a:avLst/>
+          </a:prstGeom>
+          <a:noFill/>
+        </p:spPr>
+        <p:txBody>
+          <a:bodyPr wrap="square">
+            <a:spAutoFit/>
+          </a:bodyPr>
+          <a:lstStyle/>
+          <a:p>
+            <a:pPr algn="ctr"/>
+            <a:r>
+              <a:rPr sz="4800" b="1" i="0">
+                <a:solidFill>
+                  <a:srgbClr val="FFFFFF"/>
+                </a:solidFill>
+                <a:latin typeface="Arial"/>
+              </a:rPr>
+              <a:t>叫べ われら の    王イェスは 生きている!</a:t>
+            </a:r>
+          </a:p>
+        </p:txBody>
+      </p:sp>
+      <p:sp>
+        <p:nvSpPr>
+          <p:cNvPr id="5" name="TextBox 4"/>
+          <p:cNvSpPr txBox="1"/>
+          <p:nvPr/>
+        </p:nvSpPr>
+        <p:spPr>
+          <a:xfrm>
+            <a:off x="640080" y="3753612"/>
+            <a:ext cx="10911535" cy="365760"/>
+          </a:xfrm>
+          <a:prstGeom prst="rect">
+            <a:avLst/>
+          </a:prstGeom>
+          <a:noFill/>
+        </p:spPr>
+        <p:txBody>
+          <a:bodyPr wrap="square">
+            <a:spAutoFit/>
+          </a:bodyPr>
+          <a:lstStyle/>
+          <a:p>
+            <a:pPr algn="ctr"/>
+            <a:r>
+              <a:rPr sz="2400" b="0" i="1">
+                <a:solidFill>
+                  <a:srgbClr val="AAAAAA"/>
+                </a:solidFill>
+                <a:latin typeface="Arial"/>
+              </a:rPr>
+              <a:t>sakebe warera no oh iesu wa i-kite-iru</a:t>
+            </a:r>
+          </a:p>
+        </p:txBody>
+      </p:sp>
+      <p:sp>
+        <p:nvSpPr>
+          <p:cNvPr id="6" name="TextBox 5"/>
+          <p:cNvSpPr txBox="1"/>
+          <p:nvPr/>
+        </p:nvSpPr>
+        <p:spPr>
+          <a:xfrm>
+            <a:off x="640080" y="4530852"/>
+            <a:ext cx="10911535" cy="310896"/>
           </a:xfrm>
           <a:prstGeom prst="rect">
             <a:avLst/>
@@ -6552,7 +6202,7 @@
             <a:r>
               <a:rPr sz="2000" b="0" i="1">
                 <a:solidFill>
-                  <a:srgbClr val="8C8C8C"/>
+                  <a:srgbClr val="828282"/>
                 </a:solidFill>
                 <a:latin typeface="Arial"/>
               </a:rPr>
@@ -6563,84 +6213,14 @@
       </p:sp>
       <p:sp>
         <p:nvSpPr>
-          <p:cNvPr id="5" name="TextBox 4"/>
-          <p:cNvSpPr txBox="1"/>
-          <p:nvPr/>
-        </p:nvSpPr>
-        <p:spPr>
-          <a:xfrm>
-            <a:off x="594360" y="3529584"/>
-            <a:ext cx="11002975" cy="685800"/>
-          </a:xfrm>
-          <a:prstGeom prst="rect">
-            <a:avLst/>
-          </a:prstGeom>
-          <a:noFill/>
-        </p:spPr>
-        <p:txBody>
-          <a:bodyPr wrap="square">
-            <a:spAutoFit/>
-          </a:bodyPr>
-          <a:lstStyle/>
-          <a:p>
-            <a:pPr algn="ctr"/>
-            <a:r>
-              <a:rPr sz="4400" b="1" i="0">
-                <a:solidFill>
-                  <a:srgbClr val="FFFFFF"/>
-                </a:solidFill>
-                <a:latin typeface="Arial"/>
-              </a:rPr>
-              <a:t>叫べ われら の    王イェスは 生きている!</a:t>
-            </a:r>
-          </a:p>
-        </p:txBody>
-      </p:sp>
-      <p:sp>
-        <p:nvSpPr>
-          <p:cNvPr id="6" name="TextBox 5"/>
-          <p:cNvSpPr txBox="1"/>
-          <p:nvPr/>
-        </p:nvSpPr>
-        <p:spPr>
-          <a:xfrm>
-            <a:off x="594360" y="4251960"/>
-            <a:ext cx="11002975" cy="384048"/>
-          </a:xfrm>
-          <a:prstGeom prst="rect">
-            <a:avLst/>
-          </a:prstGeom>
-          <a:noFill/>
-        </p:spPr>
-        <p:txBody>
-          <a:bodyPr wrap="square">
-            <a:spAutoFit/>
-          </a:bodyPr>
-          <a:lstStyle/>
-          <a:p>
-            <a:pPr algn="ctr"/>
-            <a:r>
-              <a:rPr sz="2400" b="0" i="1">
-                <a:solidFill>
-                  <a:srgbClr val="B4B4B4"/>
-                </a:solidFill>
-                <a:latin typeface="Arial"/>
-              </a:rPr>
-              <a:t>sakebe warera no oh iesu wa i-kite-iru</a:t>
-            </a:r>
-          </a:p>
-        </p:txBody>
-      </p:sp>
-      <p:sp>
-        <p:nvSpPr>
           <p:cNvPr id="7" name="TextBox 6"/>
           <p:cNvSpPr txBox="1"/>
           <p:nvPr/>
         </p:nvSpPr>
         <p:spPr>
           <a:xfrm>
-            <a:off x="594360" y="4672584"/>
-            <a:ext cx="11002975" cy="347472"/>
+            <a:off x="640080" y="4896612"/>
+            <a:ext cx="10911535" cy="310896"/>
           </a:xfrm>
           <a:prstGeom prst="rect">
             <a:avLst/>
@@ -6657,7 +6237,7 @@
             <a:r>
               <a:rPr sz="2000" b="0" i="1">
                 <a:solidFill>
-                  <a:srgbClr val="8C8C8C"/>
+                  <a:srgbClr val="828282"/>
                 </a:solidFill>
                 <a:latin typeface="Arial"/>
               </a:rPr>
@@ -6700,23 +6280,23 @@
         </p:nvSpPr>
         <p:spPr>
           <a:xfrm>
-            <a:off x="594360" y="2258568"/>
-            <a:ext cx="11002975" cy="685800"/>
-          </a:xfrm>
-          <a:prstGeom prst="rect">
-            <a:avLst/>
-          </a:prstGeom>
-          <a:noFill/>
-        </p:spPr>
-        <p:txBody>
-          <a:bodyPr wrap="square">
-            <a:spAutoFit/>
-          </a:bodyPr>
-          <a:lstStyle/>
-          <a:p>
-            <a:pPr algn="ctr"/>
-            <a:r>
-              <a:rPr sz="4400" b="1" i="0">
+            <a:off x="640080" y="2052828"/>
+            <a:ext cx="10911535" cy="731520"/>
+          </a:xfrm>
+          <a:prstGeom prst="rect">
+            <a:avLst/>
+          </a:prstGeom>
+          <a:noFill/>
+        </p:spPr>
+        <p:txBody>
+          <a:bodyPr wrap="square">
+            <a:spAutoFit/>
+          </a:bodyPr>
+          <a:lstStyle/>
+          <a:p>
+            <a:pPr algn="ctr"/>
+            <a:r>
+              <a:rPr sz="4800" b="1" i="0">
                 <a:solidFill>
                   <a:srgbClr val="FFFFFF"/>
                 </a:solidFill>
@@ -6735,25 +6315,60 @@
         </p:nvSpPr>
         <p:spPr>
           <a:xfrm>
-            <a:off x="594360" y="2980944"/>
-            <a:ext cx="11002975" cy="347472"/>
-          </a:xfrm>
-          <a:prstGeom prst="rect">
-            <a:avLst/>
-          </a:prstGeom>
-          <a:noFill/>
-        </p:spPr>
-        <p:txBody>
-          <a:bodyPr wrap="square">
-            <a:spAutoFit/>
-          </a:bodyPr>
-          <a:lstStyle/>
-          <a:p>
-            <a:pPr algn="ctr"/>
-            <a:r>
-              <a:rPr sz="2200" b="0" i="1">
-                <a:solidFill>
-                  <a:srgbClr val="8C8C8C"/>
+            <a:off x="640080" y="2985516"/>
+            <a:ext cx="10911535" cy="731520"/>
+          </a:xfrm>
+          <a:prstGeom prst="rect">
+            <a:avLst/>
+          </a:prstGeom>
+          <a:noFill/>
+        </p:spPr>
+        <p:txBody>
+          <a:bodyPr wrap="square">
+            <a:spAutoFit/>
+          </a:bodyPr>
+          <a:lstStyle/>
+          <a:p>
+            <a:pPr algn="ctr"/>
+            <a:r>
+              <a:rPr sz="4800" b="1" i="0">
+                <a:solidFill>
+                  <a:srgbClr val="FFFFFF"/>
+                </a:solidFill>
+                <a:latin typeface="Arial"/>
+              </a:rPr>
+              <a:t>Jesus está vivo</a:t>
+            </a:r>
+          </a:p>
+        </p:txBody>
+      </p:sp>
+      <p:sp>
+        <p:nvSpPr>
+          <p:cNvPr id="4" name="TextBox 3"/>
+          <p:cNvSpPr txBox="1"/>
+          <p:nvPr/>
+        </p:nvSpPr>
+        <p:spPr>
+          <a:xfrm>
+            <a:off x="640080" y="4128516"/>
+            <a:ext cx="10911535" cy="310896"/>
+          </a:xfrm>
+          <a:prstGeom prst="rect">
+            <a:avLst/>
+          </a:prstGeom>
+          <a:noFill/>
+        </p:spPr>
+        <p:txBody>
+          <a:bodyPr wrap="square">
+            <a:spAutoFit/>
+          </a:bodyPr>
+          <a:lstStyle/>
+          <a:p>
+            <a:pPr algn="ctr"/>
+            <a:r>
+              <a:rPr sz="2000" b="0" i="0">
+                <a:solidFill>
+                  <a:srgbClr val="828282"/>
                 </a:solidFill>
                 <a:latin typeface="Arial"/>
               </a:rPr>
@@ -6764,66 +6379,31 @@
       </p:sp>
       <p:sp>
         <p:nvSpPr>
-          <p:cNvPr id="4" name="TextBox 3"/>
-          <p:cNvSpPr txBox="1"/>
-          <p:nvPr/>
-        </p:nvSpPr>
-        <p:spPr>
-          <a:xfrm>
-            <a:off x="594360" y="3529584"/>
-            <a:ext cx="11002975" cy="685800"/>
-          </a:xfrm>
-          <a:prstGeom prst="rect">
-            <a:avLst/>
-          </a:prstGeom>
-          <a:noFill/>
-        </p:spPr>
-        <p:txBody>
-          <a:bodyPr wrap="square">
-            <a:spAutoFit/>
-          </a:bodyPr>
-          <a:lstStyle/>
-          <a:p>
-            <a:pPr algn="ctr"/>
-            <a:r>
-              <a:rPr sz="4400" b="1" i="0">
-                <a:solidFill>
-                  <a:srgbClr val="FFFFFF"/>
-                </a:solidFill>
-                <a:latin typeface="Arial"/>
-              </a:rPr>
-              <a:t>Jesus está vivo</a:t>
-            </a:r>
-          </a:p>
-        </p:txBody>
-      </p:sp>
-      <p:sp>
-        <p:nvSpPr>
           <p:cNvPr id="5" name="TextBox 4"/>
           <p:cNvSpPr txBox="1"/>
           <p:nvPr/>
         </p:nvSpPr>
         <p:spPr>
           <a:xfrm>
-            <a:off x="594360" y="4251960"/>
-            <a:ext cx="11002975" cy="347472"/>
-          </a:xfrm>
-          <a:prstGeom prst="rect">
-            <a:avLst/>
-          </a:prstGeom>
-          <a:noFill/>
-        </p:spPr>
-        <p:txBody>
-          <a:bodyPr wrap="square">
-            <a:spAutoFit/>
-          </a:bodyPr>
-          <a:lstStyle/>
-          <a:p>
-            <a:pPr algn="ctr"/>
-            <a:r>
-              <a:rPr sz="2200" b="0" i="1">
-                <a:solidFill>
-                  <a:srgbClr val="8C8C8C"/>
+            <a:off x="640080" y="4494276"/>
+            <a:ext cx="10911535" cy="310896"/>
+          </a:xfrm>
+          <a:prstGeom prst="rect">
+            <a:avLst/>
+          </a:prstGeom>
+          <a:noFill/>
+        </p:spPr>
+        <p:txBody>
+          <a:bodyPr wrap="square">
+            <a:spAutoFit/>
+          </a:bodyPr>
+          <a:lstStyle/>
+          <a:p>
+            <a:pPr algn="ctr"/>
+            <a:r>
+              <a:rPr sz="2000" b="0" i="0">
+                <a:solidFill>
+                  <a:srgbClr val="828282"/>
                 </a:solidFill>
                 <a:latin typeface="Arial"/>
               </a:rPr>
@@ -6866,23 +6446,23 @@
         </p:nvSpPr>
         <p:spPr>
           <a:xfrm>
-            <a:off x="594360" y="2258568"/>
-            <a:ext cx="11002975" cy="685800"/>
-          </a:xfrm>
-          <a:prstGeom prst="rect">
-            <a:avLst/>
-          </a:prstGeom>
-          <a:noFill/>
-        </p:spPr>
-        <p:txBody>
-          <a:bodyPr wrap="square">
-            <a:spAutoFit/>
-          </a:bodyPr>
-          <a:lstStyle/>
-          <a:p>
-            <a:pPr algn="ctr"/>
-            <a:r>
-              <a:rPr sz="4400" b="1" i="0">
+            <a:off x="640080" y="2052828"/>
+            <a:ext cx="10911535" cy="731520"/>
+          </a:xfrm>
+          <a:prstGeom prst="rect">
+            <a:avLst/>
+          </a:prstGeom>
+          <a:noFill/>
+        </p:spPr>
+        <p:txBody>
+          <a:bodyPr wrap="square">
+            <a:spAutoFit/>
+          </a:bodyPr>
+          <a:lstStyle/>
+          <a:p>
+            <a:pPr algn="ctr"/>
+            <a:r>
+              <a:rPr sz="4800" b="1" i="0">
                 <a:solidFill>
                   <a:srgbClr val="FFFFFF"/>
                 </a:solidFill>
@@ -6901,25 +6481,60 @@
         </p:nvSpPr>
         <p:spPr>
           <a:xfrm>
-            <a:off x="594360" y="2980944"/>
-            <a:ext cx="11002975" cy="347472"/>
-          </a:xfrm>
-          <a:prstGeom prst="rect">
-            <a:avLst/>
-          </a:prstGeom>
-          <a:noFill/>
-        </p:spPr>
-        <p:txBody>
-          <a:bodyPr wrap="square">
-            <a:spAutoFit/>
-          </a:bodyPr>
-          <a:lstStyle/>
-          <a:p>
-            <a:pPr algn="ctr"/>
-            <a:r>
-              <a:rPr sz="2200" b="0" i="1">
-                <a:solidFill>
-                  <a:srgbClr val="8C8C8C"/>
+            <a:off x="640080" y="2985516"/>
+            <a:ext cx="10911535" cy="731520"/>
+          </a:xfrm>
+          <a:prstGeom prst="rect">
+            <a:avLst/>
+          </a:prstGeom>
+          <a:noFill/>
+        </p:spPr>
+        <p:txBody>
+          <a:bodyPr wrap="square">
+            <a:spAutoFit/>
+          </a:bodyPr>
+          <a:lstStyle/>
+          <a:p>
+            <a:pPr algn="ctr"/>
+            <a:r>
+              <a:rPr sz="4800" b="1" i="0">
+                <a:solidFill>
+                  <a:srgbClr val="FFFFFF"/>
+                </a:solidFill>
+                <a:latin typeface="Arial"/>
+              </a:rPr>
+              <a:t>Jesus está vivo</a:t>
+            </a:r>
+          </a:p>
+        </p:txBody>
+      </p:sp>
+      <p:sp>
+        <p:nvSpPr>
+          <p:cNvPr id="4" name="TextBox 3"/>
+          <p:cNvSpPr txBox="1"/>
+          <p:nvPr/>
+        </p:nvSpPr>
+        <p:spPr>
+          <a:xfrm>
+            <a:off x="640080" y="4128516"/>
+            <a:ext cx="10911535" cy="310896"/>
+          </a:xfrm>
+          <a:prstGeom prst="rect">
+            <a:avLst/>
+          </a:prstGeom>
+          <a:noFill/>
+        </p:spPr>
+        <p:txBody>
+          <a:bodyPr wrap="square">
+            <a:spAutoFit/>
+          </a:bodyPr>
+          <a:lstStyle/>
+          <a:p>
+            <a:pPr algn="ctr"/>
+            <a:r>
+              <a:rPr sz="2000" b="0" i="0">
+                <a:solidFill>
+                  <a:srgbClr val="828282"/>
                 </a:solidFill>
                 <a:latin typeface="Arial"/>
               </a:rPr>
@@ -6930,66 +6545,31 @@
       </p:sp>
       <p:sp>
         <p:nvSpPr>
-          <p:cNvPr id="4" name="TextBox 3"/>
-          <p:cNvSpPr txBox="1"/>
-          <p:nvPr/>
-        </p:nvSpPr>
-        <p:spPr>
-          <a:xfrm>
-            <a:off x="594360" y="3529584"/>
-            <a:ext cx="11002975" cy="685800"/>
-          </a:xfrm>
-          <a:prstGeom prst="rect">
-            <a:avLst/>
-          </a:prstGeom>
-          <a:noFill/>
-        </p:spPr>
-        <p:txBody>
-          <a:bodyPr wrap="square">
-            <a:spAutoFit/>
-          </a:bodyPr>
-          <a:lstStyle/>
-          <a:p>
-            <a:pPr algn="ctr"/>
-            <a:r>
-              <a:rPr sz="4400" b="1" i="0">
-                <a:solidFill>
-                  <a:srgbClr val="FFFFFF"/>
-                </a:solidFill>
-                <a:latin typeface="Arial"/>
-              </a:rPr>
-              <a:t>Jesus está vivo</a:t>
-            </a:r>
-          </a:p>
-        </p:txBody>
-      </p:sp>
-      <p:sp>
-        <p:nvSpPr>
           <p:cNvPr id="5" name="TextBox 4"/>
           <p:cNvSpPr txBox="1"/>
           <p:nvPr/>
         </p:nvSpPr>
         <p:spPr>
           <a:xfrm>
-            <a:off x="594360" y="4251960"/>
-            <a:ext cx="11002975" cy="347472"/>
-          </a:xfrm>
-          <a:prstGeom prst="rect">
-            <a:avLst/>
-          </a:prstGeom>
-          <a:noFill/>
-        </p:spPr>
-        <p:txBody>
-          <a:bodyPr wrap="square">
-            <a:spAutoFit/>
-          </a:bodyPr>
-          <a:lstStyle/>
-          <a:p>
-            <a:pPr algn="ctr"/>
-            <a:r>
-              <a:rPr sz="2200" b="0" i="1">
-                <a:solidFill>
-                  <a:srgbClr val="8C8C8C"/>
+            <a:off x="640080" y="4494276"/>
+            <a:ext cx="10911535" cy="310896"/>
+          </a:xfrm>
+          <a:prstGeom prst="rect">
+            <a:avLst/>
+          </a:prstGeom>
+          <a:noFill/>
+        </p:spPr>
+        <p:txBody>
+          <a:bodyPr wrap="square">
+            <a:spAutoFit/>
+          </a:bodyPr>
+          <a:lstStyle/>
+          <a:p>
+            <a:pPr algn="ctr"/>
+            <a:r>
+              <a:rPr sz="2000" b="0" i="0">
+                <a:solidFill>
+                  <a:srgbClr val="828282"/>
                 </a:solidFill>
                 <a:latin typeface="Arial"/>
               </a:rPr>
@@ -7032,64 +6612,29 @@
         </p:nvSpPr>
         <p:spPr>
           <a:xfrm>
-            <a:off x="594360" y="2894076"/>
-            <a:ext cx="11002975" cy="685800"/>
-          </a:xfrm>
-          <a:prstGeom prst="rect">
-            <a:avLst/>
-          </a:prstGeom>
-          <a:noFill/>
-        </p:spPr>
-        <p:txBody>
-          <a:bodyPr wrap="square">
-            <a:spAutoFit/>
-          </a:bodyPr>
-          <a:lstStyle/>
-          <a:p>
-            <a:pPr algn="ctr"/>
-            <a:r>
-              <a:rPr sz="4400" b="1" i="0">
+            <a:off x="640080" y="2702052"/>
+            <a:ext cx="10911535" cy="731520"/>
+          </a:xfrm>
+          <a:prstGeom prst="rect">
+            <a:avLst/>
+          </a:prstGeom>
+          <a:noFill/>
+        </p:spPr>
+        <p:txBody>
+          <a:bodyPr wrap="square">
+            <a:spAutoFit/>
+          </a:bodyPr>
+          <a:lstStyle/>
+          <a:p>
+            <a:pPr algn="ctr"/>
+            <a:r>
+              <a:rPr sz="4800" b="1" i="0">
                 <a:solidFill>
                   <a:srgbClr val="FFFFFF"/>
                 </a:solidFill>
                 <a:latin typeface="Arial"/>
               </a:rPr>
               <a:t>A morte perdeu a vitória</a:t>
-            </a:r>
-          </a:p>
-        </p:txBody>
-      </p:sp>
-      <p:sp>
-        <p:nvSpPr>
-          <p:cNvPr id="3" name="TextBox 2"/>
-          <p:cNvSpPr txBox="1"/>
-          <p:nvPr/>
-        </p:nvSpPr>
-        <p:spPr>
-          <a:xfrm>
-            <a:off x="594360" y="3616452"/>
-            <a:ext cx="11002975" cy="347472"/>
-          </a:xfrm>
-          <a:prstGeom prst="rect">
-            <a:avLst/>
-          </a:prstGeom>
-          <a:noFill/>
-        </p:spPr>
-        <p:txBody>
-          <a:bodyPr wrap="square">
-            <a:spAutoFit/>
-          </a:bodyPr>
-          <a:lstStyle/>
-          <a:p>
-            <a:pPr algn="ctr"/>
-            <a:r>
-              <a:rPr sz="2200" b="0" i="1">
-                <a:solidFill>
-                  <a:srgbClr val="8C8C8C"/>
-                </a:solidFill>
-                <a:latin typeface="Arial"/>
-              </a:rPr>
-              <a:t/>
             </a:r>
           </a:p>
         </p:txBody>
@@ -7128,23 +6673,23 @@
         </p:nvSpPr>
         <p:spPr>
           <a:xfrm>
-            <a:off x="594360" y="2258568"/>
-            <a:ext cx="11002975" cy="685800"/>
-          </a:xfrm>
-          <a:prstGeom prst="rect">
-            <a:avLst/>
-          </a:prstGeom>
-          <a:noFill/>
-        </p:spPr>
-        <p:txBody>
-          <a:bodyPr wrap="square">
-            <a:spAutoFit/>
-          </a:bodyPr>
-          <a:lstStyle/>
-          <a:p>
-            <a:pPr algn="ctr"/>
-            <a:r>
-              <a:rPr sz="4400" b="1" i="0">
+            <a:off x="640080" y="2052828"/>
+            <a:ext cx="10911535" cy="731520"/>
+          </a:xfrm>
+          <a:prstGeom prst="rect">
+            <a:avLst/>
+          </a:prstGeom>
+          <a:noFill/>
+        </p:spPr>
+        <p:txBody>
+          <a:bodyPr wrap="square">
+            <a:spAutoFit/>
+          </a:bodyPr>
+          <a:lstStyle/>
+          <a:p>
+            <a:pPr algn="ctr"/>
+            <a:r>
+              <a:rPr sz="4800" b="1" i="0">
                 <a:solidFill>
                   <a:srgbClr val="FFFFFF"/>
                 </a:solidFill>
@@ -7163,99 +6708,29 @@
         </p:nvSpPr>
         <p:spPr>
           <a:xfrm>
-            <a:off x="594360" y="2980944"/>
-            <a:ext cx="11002975" cy="347472"/>
-          </a:xfrm>
-          <a:prstGeom prst="rect">
-            <a:avLst/>
-          </a:prstGeom>
-          <a:noFill/>
-        </p:spPr>
-        <p:txBody>
-          <a:bodyPr wrap="square">
-            <a:spAutoFit/>
-          </a:bodyPr>
-          <a:lstStyle/>
-          <a:p>
-            <a:pPr algn="ctr"/>
-            <a:r>
-              <a:rPr sz="2200" b="0" i="1">
-                <a:solidFill>
-                  <a:srgbClr val="8C8C8C"/>
-                </a:solidFill>
-                <a:latin typeface="Arial"/>
-              </a:rPr>
-              <a:t/>
-            </a:r>
-          </a:p>
-        </p:txBody>
-      </p:sp>
-      <p:sp>
-        <p:nvSpPr>
-          <p:cNvPr id="4" name="TextBox 3"/>
-          <p:cNvSpPr txBox="1"/>
-          <p:nvPr/>
-        </p:nvSpPr>
-        <p:spPr>
-          <a:xfrm>
-            <a:off x="594360" y="3529584"/>
-            <a:ext cx="11002975" cy="685800"/>
-          </a:xfrm>
-          <a:prstGeom prst="rect">
-            <a:avLst/>
-          </a:prstGeom>
-          <a:noFill/>
-        </p:spPr>
-        <p:txBody>
-          <a:bodyPr wrap="square">
-            <a:spAutoFit/>
-          </a:bodyPr>
-          <a:lstStyle/>
-          <a:p>
-            <a:pPr algn="ctr"/>
-            <a:r>
-              <a:rPr sz="4400" b="1" i="0">
+            <a:off x="640080" y="2985516"/>
+            <a:ext cx="10911535" cy="731520"/>
+          </a:xfrm>
+          <a:prstGeom prst="rect">
+            <a:avLst/>
+          </a:prstGeom>
+          <a:noFill/>
+        </p:spPr>
+        <p:txBody>
+          <a:bodyPr wrap="square">
+            <a:spAutoFit/>
+          </a:bodyPr>
+          <a:lstStyle/>
+          <a:p>
+            <a:pPr algn="ctr"/>
+            <a:r>
+              <a:rPr sz="4800" b="1" i="0">
                 <a:solidFill>
                   <a:srgbClr val="FFFFFF"/>
                 </a:solidFill>
                 <a:latin typeface="Arial"/>
               </a:rPr>
               <a:t>Jesus vive para sempre</a:t>
-            </a:r>
-          </a:p>
-        </p:txBody>
-      </p:sp>
-      <p:sp>
-        <p:nvSpPr>
-          <p:cNvPr id="5" name="TextBox 4"/>
-          <p:cNvSpPr txBox="1"/>
-          <p:nvPr/>
-        </p:nvSpPr>
-        <p:spPr>
-          <a:xfrm>
-            <a:off x="594360" y="4251960"/>
-            <a:ext cx="11002975" cy="347472"/>
-          </a:xfrm>
-          <a:prstGeom prst="rect">
-            <a:avLst/>
-          </a:prstGeom>
-          <a:noFill/>
-        </p:spPr>
-        <p:txBody>
-          <a:bodyPr wrap="square">
-            <a:spAutoFit/>
-          </a:bodyPr>
-          <a:lstStyle/>
-          <a:p>
-            <a:pPr algn="ctr"/>
-            <a:r>
-              <a:rPr sz="2200" b="0" i="1">
-                <a:solidFill>
-                  <a:srgbClr val="8C8C8C"/>
-                </a:solidFill>
-                <a:latin typeface="Arial"/>
-              </a:rPr>
-              <a:t/>
             </a:r>
           </a:p>
         </p:txBody>

--- a/output_pptx/Jesus_Is_Alive.pptx
+++ b/output_pptx/Jesus_Is_Alive.pptx
@@ -3424,6 +3424,76 @@
           </a:p>
         </p:txBody>
       </p:sp>
+      <p:sp>
+        <p:nvSpPr>
+          <p:cNvPr id="4" name="TextBox 3"/>
+          <p:cNvSpPr txBox="1"/>
+          <p:nvPr/>
+        </p:nvSpPr>
+        <p:spPr>
+          <a:xfrm>
+            <a:off x="640080" y="4128516"/>
+            <a:ext cx="10911535" cy="310896"/>
+          </a:xfrm>
+          <a:prstGeom prst="rect">
+            <a:avLst/>
+          </a:prstGeom>
+          <a:noFill/>
+        </p:spPr>
+        <p:txBody>
+          <a:bodyPr wrap="square">
+            <a:spAutoFit/>
+          </a:bodyPr>
+          <a:lstStyle/>
+          <a:p>
+            <a:pPr algn="ctr"/>
+            <a:r>
+              <a:rPr sz="2000" b="0" i="0">
+                <a:solidFill>
+                  <a:srgbClr val="828282"/>
+                </a:solidFill>
+                <a:latin typeface="Arial"/>
+              </a:rPr>
+              <a:t>彼は生きている</a:t>
+            </a:r>
+          </a:p>
+        </p:txBody>
+      </p:sp>
+      <p:sp>
+        <p:nvSpPr>
+          <p:cNvPr id="5" name="TextBox 4"/>
+          <p:cNvSpPr txBox="1"/>
+          <p:nvPr/>
+        </p:nvSpPr>
+        <p:spPr>
+          <a:xfrm>
+            <a:off x="640080" y="4494276"/>
+            <a:ext cx="10911535" cy="310896"/>
+          </a:xfrm>
+          <a:prstGeom prst="rect">
+            <a:avLst/>
+          </a:prstGeom>
+          <a:noFill/>
+        </p:spPr>
+        <p:txBody>
+          <a:bodyPr wrap="square">
+            <a:spAutoFit/>
+          </a:bodyPr>
+          <a:lstStyle/>
+          <a:p>
+            <a:pPr algn="ctr"/>
+            <a:r>
+              <a:rPr sz="2000" b="0" i="0">
+                <a:solidFill>
+                  <a:srgbClr val="828282"/>
+                </a:solidFill>
+                <a:latin typeface="Arial"/>
+              </a:rPr>
+              <a:t>彼は生きている</a:t>
+            </a:r>
+          </a:p>
+        </p:txBody>
+      </p:sp>
     </p:spTree>
   </p:cSld>
   <p:clrMapOvr>
@@ -3485,6 +3555,41 @@
           </a:p>
         </p:txBody>
       </p:sp>
+      <p:sp>
+        <p:nvSpPr>
+          <p:cNvPr id="3" name="TextBox 2"/>
+          <p:cNvSpPr txBox="1"/>
+          <p:nvPr/>
+        </p:nvSpPr>
+        <p:spPr>
+          <a:xfrm>
+            <a:off x="640080" y="3845052"/>
+            <a:ext cx="10911535" cy="310896"/>
+          </a:xfrm>
+          <a:prstGeom prst="rect">
+            <a:avLst/>
+          </a:prstGeom>
+          <a:noFill/>
+        </p:spPr>
+        <p:txBody>
+          <a:bodyPr wrap="square">
+            <a:spAutoFit/>
+          </a:bodyPr>
+          <a:lstStyle/>
+          <a:p>
+            <a:pPr algn="ctr"/>
+            <a:r>
+              <a:rPr sz="2000" b="0" i="0">
+                <a:solidFill>
+                  <a:srgbClr val="828282"/>
+                </a:solidFill>
+                <a:latin typeface="Arial"/>
+              </a:rPr>
+              <a:t>彼はアルファであり、オメガである</a:t>
+            </a:r>
+          </a:p>
+        </p:txBody>
+      </p:sp>
     </p:spTree>
   </p:cSld>
   <p:clrMapOvr>
@@ -3913,6 +4018,76 @@
           </a:p>
         </p:txBody>
       </p:sp>
+      <p:sp>
+        <p:nvSpPr>
+          <p:cNvPr id="4" name="TextBox 3"/>
+          <p:cNvSpPr txBox="1"/>
+          <p:nvPr/>
+        </p:nvSpPr>
+        <p:spPr>
+          <a:xfrm>
+            <a:off x="640080" y="4128516"/>
+            <a:ext cx="10911535" cy="310896"/>
+          </a:xfrm>
+          <a:prstGeom prst="rect">
+            <a:avLst/>
+          </a:prstGeom>
+          <a:noFill/>
+        </p:spPr>
+        <p:txBody>
+          <a:bodyPr wrap="square">
+            <a:spAutoFit/>
+          </a:bodyPr>
+          <a:lstStyle/>
+          <a:p>
+            <a:pPr algn="ctr"/>
+            <a:r>
+              <a:rPr sz="2000" b="0" i="0">
+                <a:solidFill>
+                  <a:srgbClr val="828282"/>
+                </a:solidFill>
+                <a:latin typeface="Arial"/>
+              </a:rPr>
+              <a:t>彼は生きている</a:t>
+            </a:r>
+          </a:p>
+        </p:txBody>
+      </p:sp>
+      <p:sp>
+        <p:nvSpPr>
+          <p:cNvPr id="5" name="TextBox 4"/>
+          <p:cNvSpPr txBox="1"/>
+          <p:nvPr/>
+        </p:nvSpPr>
+        <p:spPr>
+          <a:xfrm>
+            <a:off x="640080" y="4494276"/>
+            <a:ext cx="10911535" cy="310896"/>
+          </a:xfrm>
+          <a:prstGeom prst="rect">
+            <a:avLst/>
+          </a:prstGeom>
+          <a:noFill/>
+        </p:spPr>
+        <p:txBody>
+          <a:bodyPr wrap="square">
+            <a:spAutoFit/>
+          </a:bodyPr>
+          <a:lstStyle/>
+          <a:p>
+            <a:pPr algn="ctr"/>
+            <a:r>
+              <a:rPr sz="2000" b="0" i="0">
+                <a:solidFill>
+                  <a:srgbClr val="828282"/>
+                </a:solidFill>
+                <a:latin typeface="Arial"/>
+              </a:rPr>
+              <a:t>彼は生きている</a:t>
+            </a:r>
+          </a:p>
+        </p:txBody>
+      </p:sp>
     </p:spTree>
   </p:cSld>
   <p:clrMapOvr>
@@ -4481,6 +4656,76 @@
           </a:p>
         </p:txBody>
       </p:sp>
+      <p:sp>
+        <p:nvSpPr>
+          <p:cNvPr id="4" name="TextBox 3"/>
+          <p:cNvSpPr txBox="1"/>
+          <p:nvPr/>
+        </p:nvSpPr>
+        <p:spPr>
+          <a:xfrm>
+            <a:off x="640080" y="4128516"/>
+            <a:ext cx="10911535" cy="310896"/>
+          </a:xfrm>
+          <a:prstGeom prst="rect">
+            <a:avLst/>
+          </a:prstGeom>
+          <a:noFill/>
+        </p:spPr>
+        <p:txBody>
+          <a:bodyPr wrap="square">
+            <a:spAutoFit/>
+          </a:bodyPr>
+          <a:lstStyle/>
+          <a:p>
+            <a:pPr algn="ctr"/>
+            <a:r>
+              <a:rPr sz="2000" b="0" i="0">
+                <a:solidFill>
+                  <a:srgbClr val="828282"/>
+                </a:solidFill>
+                <a:latin typeface="Arial"/>
+              </a:rPr>
+              <a:t>イエスは生きている</a:t>
+            </a:r>
+          </a:p>
+        </p:txBody>
+      </p:sp>
+      <p:sp>
+        <p:nvSpPr>
+          <p:cNvPr id="5" name="TextBox 4"/>
+          <p:cNvSpPr txBox="1"/>
+          <p:nvPr/>
+        </p:nvSpPr>
+        <p:spPr>
+          <a:xfrm>
+            <a:off x="640080" y="4494276"/>
+            <a:ext cx="10911535" cy="310896"/>
+          </a:xfrm>
+          <a:prstGeom prst="rect">
+            <a:avLst/>
+          </a:prstGeom>
+          <a:noFill/>
+        </p:spPr>
+        <p:txBody>
+          <a:bodyPr wrap="square">
+            <a:spAutoFit/>
+          </a:bodyPr>
+          <a:lstStyle/>
+          <a:p>
+            <a:pPr algn="ctr"/>
+            <a:r>
+              <a:rPr sz="2000" b="0" i="0">
+                <a:solidFill>
+                  <a:srgbClr val="828282"/>
+                </a:solidFill>
+                <a:latin typeface="Arial"/>
+              </a:rPr>
+              <a:t>イエスは生きている</a:t>
+            </a:r>
+          </a:p>
+        </p:txBody>
+      </p:sp>
     </p:spTree>
   </p:cSld>
   <p:clrMapOvr>
@@ -4577,6 +4822,76 @@
           </a:p>
         </p:txBody>
       </p:sp>
+      <p:sp>
+        <p:nvSpPr>
+          <p:cNvPr id="4" name="TextBox 3"/>
+          <p:cNvSpPr txBox="1"/>
+          <p:nvPr/>
+        </p:nvSpPr>
+        <p:spPr>
+          <a:xfrm>
+            <a:off x="640080" y="4128516"/>
+            <a:ext cx="10911535" cy="310896"/>
+          </a:xfrm>
+          <a:prstGeom prst="rect">
+            <a:avLst/>
+          </a:prstGeom>
+          <a:noFill/>
+        </p:spPr>
+        <p:txBody>
+          <a:bodyPr wrap="square">
+            <a:spAutoFit/>
+          </a:bodyPr>
+          <a:lstStyle/>
+          <a:p>
+            <a:pPr algn="ctr"/>
+            <a:r>
+              <a:rPr sz="2000" b="0" i="0">
+                <a:solidFill>
+                  <a:srgbClr val="828282"/>
+                </a:solidFill>
+                <a:latin typeface="Arial"/>
+              </a:rPr>
+              <a:t>イエスは生きている</a:t>
+            </a:r>
+          </a:p>
+        </p:txBody>
+      </p:sp>
+      <p:sp>
+        <p:nvSpPr>
+          <p:cNvPr id="5" name="TextBox 4"/>
+          <p:cNvSpPr txBox="1"/>
+          <p:nvPr/>
+        </p:nvSpPr>
+        <p:spPr>
+          <a:xfrm>
+            <a:off x="640080" y="4494276"/>
+            <a:ext cx="10911535" cy="310896"/>
+          </a:xfrm>
+          <a:prstGeom prst="rect">
+            <a:avLst/>
+          </a:prstGeom>
+          <a:noFill/>
+        </p:spPr>
+        <p:txBody>
+          <a:bodyPr wrap="square">
+            <a:spAutoFit/>
+          </a:bodyPr>
+          <a:lstStyle/>
+          <a:p>
+            <a:pPr algn="ctr"/>
+            <a:r>
+              <a:rPr sz="2000" b="0" i="0">
+                <a:solidFill>
+                  <a:srgbClr val="828282"/>
+                </a:solidFill>
+                <a:latin typeface="Arial"/>
+              </a:rPr>
+              <a:t>イエスは生きている</a:t>
+            </a:r>
+          </a:p>
+        </p:txBody>
+      </p:sp>
     </p:spTree>
   </p:cSld>
   <p:clrMapOvr>
@@ -4638,6 +4953,41 @@
           </a:p>
         </p:txBody>
       </p:sp>
+      <p:sp>
+        <p:nvSpPr>
+          <p:cNvPr id="3" name="TextBox 2"/>
+          <p:cNvSpPr txBox="1"/>
+          <p:nvPr/>
+        </p:nvSpPr>
+        <p:spPr>
+          <a:xfrm>
+            <a:off x="640080" y="3845052"/>
+            <a:ext cx="10911535" cy="310896"/>
+          </a:xfrm>
+          <a:prstGeom prst="rect">
+            <a:avLst/>
+          </a:prstGeom>
+          <a:noFill/>
+        </p:spPr>
+        <p:txBody>
+          <a:bodyPr wrap="square">
+            <a:spAutoFit/>
+          </a:bodyPr>
+          <a:lstStyle/>
+          <a:p>
+            <a:pPr algn="ctr"/>
+            <a:r>
+              <a:rPr sz="2000" b="0" i="0">
+                <a:solidFill>
+                  <a:srgbClr val="828282"/>
+                </a:solidFill>
+                <a:latin typeface="Arial"/>
+              </a:rPr>
+              <a:t>イエスは生きている</a:t>
+            </a:r>
+          </a:p>
+        </p:txBody>
+      </p:sp>
     </p:spTree>
   </p:cSld>
   <p:clrMapOvr>
@@ -5302,6 +5652,76 @@
           </a:p>
         </p:txBody>
       </p:sp>
+      <p:sp>
+        <p:nvSpPr>
+          <p:cNvPr id="4" name="TextBox 3"/>
+          <p:cNvSpPr txBox="1"/>
+          <p:nvPr/>
+        </p:nvSpPr>
+        <p:spPr>
+          <a:xfrm>
+            <a:off x="640080" y="4128516"/>
+            <a:ext cx="10911535" cy="310896"/>
+          </a:xfrm>
+          <a:prstGeom prst="rect">
+            <a:avLst/>
+          </a:prstGeom>
+          <a:noFill/>
+        </p:spPr>
+        <p:txBody>
+          <a:bodyPr wrap="square">
+            <a:spAutoFit/>
+          </a:bodyPr>
+          <a:lstStyle/>
+          <a:p>
+            <a:pPr algn="ctr"/>
+            <a:r>
+              <a:rPr sz="2000" b="0" i="0">
+                <a:solidFill>
+                  <a:srgbClr val="828282"/>
+                </a:solidFill>
+                <a:latin typeface="Arial"/>
+              </a:rPr>
+              <a:t>彼は生きている</a:t>
+            </a:r>
+          </a:p>
+        </p:txBody>
+      </p:sp>
+      <p:sp>
+        <p:nvSpPr>
+          <p:cNvPr id="5" name="TextBox 4"/>
+          <p:cNvSpPr txBox="1"/>
+          <p:nvPr/>
+        </p:nvSpPr>
+        <p:spPr>
+          <a:xfrm>
+            <a:off x="640080" y="4494276"/>
+            <a:ext cx="10911535" cy="310896"/>
+          </a:xfrm>
+          <a:prstGeom prst="rect">
+            <a:avLst/>
+          </a:prstGeom>
+          <a:noFill/>
+        </p:spPr>
+        <p:txBody>
+          <a:bodyPr wrap="square">
+            <a:spAutoFit/>
+          </a:bodyPr>
+          <a:lstStyle/>
+          <a:p>
+            <a:pPr algn="ctr"/>
+            <a:r>
+              <a:rPr sz="2000" b="0" i="0">
+                <a:solidFill>
+                  <a:srgbClr val="828282"/>
+                </a:solidFill>
+                <a:latin typeface="Arial"/>
+              </a:rPr>
+              <a:t>彼は生きている</a:t>
+            </a:r>
+          </a:p>
+        </p:txBody>
+      </p:sp>
     </p:spTree>
   </p:cSld>
   <p:clrMapOvr>
@@ -6639,6 +7059,41 @@
           </a:p>
         </p:txBody>
       </p:sp>
+      <p:sp>
+        <p:nvSpPr>
+          <p:cNvPr id="3" name="TextBox 2"/>
+          <p:cNvSpPr txBox="1"/>
+          <p:nvPr/>
+        </p:nvSpPr>
+        <p:spPr>
+          <a:xfrm>
+            <a:off x="640080" y="3845052"/>
+            <a:ext cx="10911535" cy="310896"/>
+          </a:xfrm>
+          <a:prstGeom prst="rect">
+            <a:avLst/>
+          </a:prstGeom>
+          <a:noFill/>
+        </p:spPr>
+        <p:txBody>
+          <a:bodyPr wrap="square">
+            <a:spAutoFit/>
+          </a:bodyPr>
+          <a:lstStyle/>
+          <a:p>
+            <a:pPr algn="ctr"/>
+            <a:r>
+              <a:rPr sz="2000" b="0" i="0">
+                <a:solidFill>
+                  <a:srgbClr val="828282"/>
+                </a:solidFill>
+                <a:latin typeface="Arial"/>
+              </a:rPr>
+              <a:t>死は勝利を失った</a:t>
+            </a:r>
+          </a:p>
+        </p:txBody>
+      </p:sp>
     </p:spTree>
   </p:cSld>
   <p:clrMapOvr>
@@ -6731,6 +7186,76 @@
                 <a:latin typeface="Arial"/>
               </a:rPr>
               <a:t>Jesus vive para sempre</a:t>
+            </a:r>
+          </a:p>
+        </p:txBody>
+      </p:sp>
+      <p:sp>
+        <p:nvSpPr>
+          <p:cNvPr id="4" name="TextBox 3"/>
+          <p:cNvSpPr txBox="1"/>
+          <p:nvPr/>
+        </p:nvSpPr>
+        <p:spPr>
+          <a:xfrm>
+            <a:off x="640080" y="4128516"/>
+            <a:ext cx="10911535" cy="310896"/>
+          </a:xfrm>
+          <a:prstGeom prst="rect">
+            <a:avLst/>
+          </a:prstGeom>
+          <a:noFill/>
+        </p:spPr>
+        <p:txBody>
+          <a:bodyPr wrap="square">
+            <a:spAutoFit/>
+          </a:bodyPr>
+          <a:lstStyle/>
+          <a:p>
+            <a:pPr algn="ctr"/>
+            <a:r>
+              <a:rPr sz="2000" b="0" i="0">
+                <a:solidFill>
+                  <a:srgbClr val="828282"/>
+                </a:solidFill>
+                <a:latin typeface="Arial"/>
+              </a:rPr>
+              <a:t>そして墓は否定された</a:t>
+            </a:r>
+          </a:p>
+        </p:txBody>
+      </p:sp>
+      <p:sp>
+        <p:nvSpPr>
+          <p:cNvPr id="5" name="TextBox 4"/>
+          <p:cNvSpPr txBox="1"/>
+          <p:nvPr/>
+        </p:nvSpPr>
+        <p:spPr>
+          <a:xfrm>
+            <a:off x="640080" y="4494276"/>
+            <a:ext cx="10911535" cy="310896"/>
+          </a:xfrm>
+          <a:prstGeom prst="rect">
+            <a:avLst/>
+          </a:prstGeom>
+          <a:noFill/>
+        </p:spPr>
+        <p:txBody>
+          <a:bodyPr wrap="square">
+            <a:spAutoFit/>
+          </a:bodyPr>
+          <a:lstStyle/>
+          <a:p>
+            <a:pPr algn="ctr"/>
+            <a:r>
+              <a:rPr sz="2000" b="0" i="0">
+                <a:solidFill>
+                  <a:srgbClr val="828282"/>
+                </a:solidFill>
+                <a:latin typeface="Arial"/>
+              </a:rPr>
+              <a:t>イエスは永遠に生きている</a:t>
             </a:r>
           </a:p>
         </p:txBody>
